--- a/docs/BL_ranking_part2.pptx
+++ b/docs/BL_ranking_part2.pptx
@@ -9507,7 +9507,7 @@
                 <a:ea typeface="Calibri" pitchFamily="34" charset="-122"/>
                 <a:cs typeface="Calibri" pitchFamily="34" charset="-120"/>
               </a:rPr>
-              <a:t>It is in the compose file as proof the artifact is portable. Not the primary path: the funnel wants plain JSON, and readiness, metrics and a typed schema are not optional on a revenue path.</a:t>
+              <a:t>Registered with every model version, so Databricks serves that exact artifact. Not the primary local path: the funnel wants plain JSON, and readiness and a typed schema are not optional.</a:t>
             </a:r>
             <a:endParaRPr lang="en-US" sz="1200" dirty="0"/>
           </a:p>

--- a/docs/BL_ranking_part2.pptx
+++ b/docs/BL_ranking_part2.pptx
@@ -12728,7 +12728,7 @@
                 <a:ea typeface="Calibri" pitchFamily="34" charset="-122"/>
                 <a:cs typeface="Calibri" pitchFamily="34" charset="-120"/>
               </a:rPr>
-              <a:t>Both research modes preserved, both fully instrumented.</a:t>
+              <a:t>The 7-day split is unconditional: production fits the same rows, and scores none.</a:t>
             </a:r>
             <a:endParaRPr lang="en-US" sz="1400" dirty="0"/>
           </a:p>
@@ -12974,7 +12974,7 @@
                           <a:ea typeface="Calibri" pitchFamily="34" charset="-122"/>
                           <a:cs typeface="Calibri" pitchFamily="34" charset="-120"/>
                         </a:rPr>
-                        <a:t>data</a:t>
+                        <a:t>fitted on</a:t>
                       </a:r>
                       <a:endParaRPr lang="en-US" sz="1250" dirty="0">
                         <a:latin typeface="Calibri" charset="0"/>
@@ -13104,7 +13104,7 @@
                           <a:ea typeface="Calibri" pitchFamily="34" charset="-122"/>
                           <a:cs typeface="Calibri" pitchFamily="34" charset="-120"/>
                         </a:rPr>
-                        <a:t>everything</a:t>
+                        <a:t>the same 7-day split</a:t>
                       </a:r>
                       <a:endParaRPr lang="en-US" sz="1250" dirty="0">
                         <a:latin typeface="Calibri" charset="0"/>

--- a/docs/BL_ranking_part2.pptx
+++ b/docs/BL_ranking_part2.pptx
@@ -11945,7 +11945,7 @@
                           <a:ea typeface="Calibri" pitchFamily="34" charset="-122"/>
                           <a:cs typeface="Calibri" pitchFamily="34" charset="-120"/>
                         </a:rPr>
-                        <a:t>Unity Catalog Delta table</a:t>
+                        <a:t>Delta table in a UC volume</a:t>
                       </a:r>
                       <a:endParaRPr lang="en-US" sz="1250" dirty="0">
                         <a:latin typeface="Calibri" charset="0"/>
@@ -12559,7 +12559,7 @@
                 <a:ea typeface="Calibri" pitchFamily="34" charset="-122"/>
                 <a:cs typeface="Calibri" pitchFamily="34" charset="-120"/>
               </a:rPr>
-              <a:t>One Quartz string in conf/config.yaml drives both schedules — a test asserts they cannot drift apart.</a:t>
+              <a:t>The Quartz string is copied into the bundle — a test fails if the two ever differ.</a:t>
             </a:r>
             <a:endParaRPr lang="en-US" sz="1250" dirty="0"/>
           </a:p>

--- a/docs/BL_ranking_part2.pptx
+++ b/docs/BL_ranking_part2.pptx
@@ -4965,6 +4965,10 @@
           </a:solidFill>
           <a:ln/>
         </p:spPr>
+        <p:txBody>
+          <a:bodyPr/>
+          <a:p/>
+        </p:txBody>
       </p:sp>
       <p:sp>
         <p:nvSpPr>
@@ -5109,6 +5113,10 @@
             <a:prstDash val="solid"/>
           </a:ln>
         </p:spPr>
+        <p:txBody>
+          <a:bodyPr/>
+          <a:p/>
+        </p:txBody>
       </p:sp>
       <p:sp>
         <p:nvSpPr>
@@ -5624,7 +5632,7 @@
                           <a:ea typeface="Calibri" pitchFamily="34" charset="-122"/>
                           <a:cs typeface="Calibri" pitchFamily="34" charset="-120"/>
                         </a:rPr>
-                        <a:t>p90</a:t>
+                        <a:t>p99</a:t>
                       </a:r>
                       <a:endParaRPr lang="en-US" sz="1200" dirty="0">
                         <a:latin typeface="Calibri" charset="0"/>
@@ -5692,7 +5700,7 @@
                           <a:ea typeface="Calibri" pitchFamily="34" charset="-122"/>
                           <a:cs typeface="Calibri" pitchFamily="34" charset="-120"/>
                         </a:rPr>
-                        <a:t>p99</a:t>
+                        <a:t>handler</a:t>
                       </a:r>
                       <a:endParaRPr lang="en-US" sz="1200" dirty="0">
                         <a:latin typeface="Calibri" charset="0"/>
@@ -5760,7 +5768,7 @@
                           <a:ea typeface="Calibri" pitchFamily="34" charset="-122"/>
                           <a:cs typeface="Calibri" pitchFamily="34" charset="-120"/>
                         </a:rPr>
-                        <a:t>errors</a:t>
+                        <a:t>runs ok</a:t>
                       </a:r>
                       <a:endParaRPr lang="en-US" sz="1200" dirty="0">
                         <a:latin typeface="Calibri" charset="0"/>
@@ -5809,790 +5817,6 @@
                     <a:solidFill>
                       <a:srgbClr val="0F2A3F"/>
                     </a:solidFill>
-                  </a:tcPr>
-                </a:tc>
-              </a:tr>
-              <a:tr h="365760">
-                <a:tc>
-                  <a:txBody>
-                    <a:bodyPr/>
-                    <a:lstStyle/>
-                    <a:p>
-                      <a:pPr indent="0" marL="0">
-                        <a:buNone/>
-                      </a:pPr>
-                      <a:r>
-                        <a:rPr lang="en-US" sz="1250" dirty="0">
-                          <a:solidFill>
-                            <a:srgbClr val="2B3A44"/>
-                          </a:solidFill>
-                          <a:latin typeface="Calibri" pitchFamily="34" charset="0"/>
-                          <a:ea typeface="Calibri" pitchFamily="34" charset="-122"/>
-                          <a:cs typeface="Calibri" pitchFamily="34" charset="-120"/>
-                        </a:rPr>
-                        <a:t>25</a:t>
-                      </a:r>
-                      <a:endParaRPr lang="en-US" sz="1250" dirty="0">
-                        <a:latin typeface="Calibri" charset="0"/>
-                        <a:ea typeface="Calibri" charset="0"/>
-                        <a:cs typeface="Calibri" charset="0"/>
-                      </a:endParaRPr>
-                    </a:p>
-                  </a:txBody>
-                  <a:tcPr marL="91440" marR="91440" marT="45720" marB="45720" anchor="ctr">
-                    <a:lnL w="6350" cap="flat" cmpd="sng" algn="ctr">
-                      <a:solidFill>
-                        <a:srgbClr val="DDE5EA"/>
-                      </a:solidFill>
-                      <a:prstDash val="solid"/>
-                      <a:round/>
-                      <a:headEnd type="none" w="med" len="med"/>
-                      <a:tailEnd type="none" w="med" len="med"/>
-                    </a:lnL>
-                    <a:lnR w="6350" cap="flat" cmpd="sng" algn="ctr">
-                      <a:solidFill>
-                        <a:srgbClr val="DDE5EA"/>
-                      </a:solidFill>
-                      <a:prstDash val="solid"/>
-                      <a:round/>
-                      <a:headEnd type="none" w="med" len="med"/>
-                      <a:tailEnd type="none" w="med" len="med"/>
-                    </a:lnR>
-                    <a:lnT w="6350" cap="flat" cmpd="sng" algn="ctr">
-                      <a:solidFill>
-                        <a:srgbClr val="DDE5EA"/>
-                      </a:solidFill>
-                      <a:prstDash val="solid"/>
-                      <a:round/>
-                      <a:headEnd type="none" w="med" len="med"/>
-                      <a:tailEnd type="none" w="med" len="med"/>
-                    </a:lnT>
-                    <a:lnB w="6350" cap="flat" cmpd="sng" algn="ctr">
-                      <a:solidFill>
-                        <a:srgbClr val="DDE5EA"/>
-                      </a:solidFill>
-                      <a:prstDash val="solid"/>
-                      <a:round/>
-                      <a:headEnd type="none" w="med" len="med"/>
-                      <a:tailEnd type="none" w="med" len="med"/>
-                    </a:lnB>
-                  </a:tcPr>
-                </a:tc>
-                <a:tc>
-                  <a:txBody>
-                    <a:bodyPr/>
-                    <a:lstStyle/>
-                    <a:p>
-                      <a:pPr indent="0" marL="0">
-                        <a:buNone/>
-                      </a:pPr>
-                      <a:r>
-                        <a:rPr lang="en-US" sz="1250" dirty="0">
-                          <a:solidFill>
-                            <a:srgbClr val="2B3A44"/>
-                          </a:solidFill>
-                          <a:latin typeface="Calibri" pitchFamily="34" charset="0"/>
-                          <a:ea typeface="Calibri" pitchFamily="34" charset="-122"/>
-                          <a:cs typeface="Calibri" pitchFamily="34" charset="-120"/>
-                        </a:rPr>
-                        <a:t>24.2</a:t>
-                      </a:r>
-                      <a:endParaRPr lang="en-US" sz="1250" dirty="0">
-                        <a:latin typeface="Calibri" charset="0"/>
-                        <a:ea typeface="Calibri" charset="0"/>
-                        <a:cs typeface="Calibri" charset="0"/>
-                      </a:endParaRPr>
-                    </a:p>
-                  </a:txBody>
-                  <a:tcPr marL="91440" marR="91440" marT="45720" marB="45720" anchor="ctr">
-                    <a:lnL w="6350" cap="flat" cmpd="sng" algn="ctr">
-                      <a:solidFill>
-                        <a:srgbClr val="DDE5EA"/>
-                      </a:solidFill>
-                      <a:prstDash val="solid"/>
-                      <a:round/>
-                      <a:headEnd type="none" w="med" len="med"/>
-                      <a:tailEnd type="none" w="med" len="med"/>
-                    </a:lnL>
-                    <a:lnR w="6350" cap="flat" cmpd="sng" algn="ctr">
-                      <a:solidFill>
-                        <a:srgbClr val="DDE5EA"/>
-                      </a:solidFill>
-                      <a:prstDash val="solid"/>
-                      <a:round/>
-                      <a:headEnd type="none" w="med" len="med"/>
-                      <a:tailEnd type="none" w="med" len="med"/>
-                    </a:lnR>
-                    <a:lnT w="6350" cap="flat" cmpd="sng" algn="ctr">
-                      <a:solidFill>
-                        <a:srgbClr val="DDE5EA"/>
-                      </a:solidFill>
-                      <a:prstDash val="solid"/>
-                      <a:round/>
-                      <a:headEnd type="none" w="med" len="med"/>
-                      <a:tailEnd type="none" w="med" len="med"/>
-                    </a:lnT>
-                    <a:lnB w="6350" cap="flat" cmpd="sng" algn="ctr">
-                      <a:solidFill>
-                        <a:srgbClr val="DDE5EA"/>
-                      </a:solidFill>
-                      <a:prstDash val="solid"/>
-                      <a:round/>
-                      <a:headEnd type="none" w="med" len="med"/>
-                      <a:tailEnd type="none" w="med" len="med"/>
-                    </a:lnB>
-                  </a:tcPr>
-                </a:tc>
-                <a:tc>
-                  <a:txBody>
-                    <a:bodyPr/>
-                    <a:lstStyle/>
-                    <a:p>
-                      <a:pPr indent="0" marL="0">
-                        <a:buNone/>
-                      </a:pPr>
-                      <a:r>
-                        <a:rPr lang="en-US" sz="1250" dirty="0">
-                          <a:solidFill>
-                            <a:srgbClr val="2B3A44"/>
-                          </a:solidFill>
-                          <a:latin typeface="Calibri" pitchFamily="34" charset="0"/>
-                          <a:ea typeface="Calibri" pitchFamily="34" charset="-122"/>
-                          <a:cs typeface="Calibri" pitchFamily="34" charset="-120"/>
-                        </a:rPr>
-                        <a:t>10.4</a:t>
-                      </a:r>
-                      <a:endParaRPr lang="en-US" sz="1250" dirty="0">
-                        <a:latin typeface="Calibri" charset="0"/>
-                        <a:ea typeface="Calibri" charset="0"/>
-                        <a:cs typeface="Calibri" charset="0"/>
-                      </a:endParaRPr>
-                    </a:p>
-                  </a:txBody>
-                  <a:tcPr marL="91440" marR="91440" marT="45720" marB="45720" anchor="ctr">
-                    <a:lnL w="6350" cap="flat" cmpd="sng" algn="ctr">
-                      <a:solidFill>
-                        <a:srgbClr val="DDE5EA"/>
-                      </a:solidFill>
-                      <a:prstDash val="solid"/>
-                      <a:round/>
-                      <a:headEnd type="none" w="med" len="med"/>
-                      <a:tailEnd type="none" w="med" len="med"/>
-                    </a:lnL>
-                    <a:lnR w="6350" cap="flat" cmpd="sng" algn="ctr">
-                      <a:solidFill>
-                        <a:srgbClr val="DDE5EA"/>
-                      </a:solidFill>
-                      <a:prstDash val="solid"/>
-                      <a:round/>
-                      <a:headEnd type="none" w="med" len="med"/>
-                      <a:tailEnd type="none" w="med" len="med"/>
-                    </a:lnR>
-                    <a:lnT w="6350" cap="flat" cmpd="sng" algn="ctr">
-                      <a:solidFill>
-                        <a:srgbClr val="DDE5EA"/>
-                      </a:solidFill>
-                      <a:prstDash val="solid"/>
-                      <a:round/>
-                      <a:headEnd type="none" w="med" len="med"/>
-                      <a:tailEnd type="none" w="med" len="med"/>
-                    </a:lnT>
-                    <a:lnB w="6350" cap="flat" cmpd="sng" algn="ctr">
-                      <a:solidFill>
-                        <a:srgbClr val="DDE5EA"/>
-                      </a:solidFill>
-                      <a:prstDash val="solid"/>
-                      <a:round/>
-                      <a:headEnd type="none" w="med" len="med"/>
-                      <a:tailEnd type="none" w="med" len="med"/>
-                    </a:lnB>
-                  </a:tcPr>
-                </a:tc>
-                <a:tc>
-                  <a:txBody>
-                    <a:bodyPr/>
-                    <a:lstStyle/>
-                    <a:p>
-                      <a:pPr indent="0" marL="0">
-                        <a:buNone/>
-                      </a:pPr>
-                      <a:r>
-                        <a:rPr lang="en-US" sz="1250" dirty="0">
-                          <a:solidFill>
-                            <a:srgbClr val="2B3A44"/>
-                          </a:solidFill>
-                          <a:latin typeface="Calibri" pitchFamily="34" charset="0"/>
-                          <a:ea typeface="Calibri" pitchFamily="34" charset="-122"/>
-                          <a:cs typeface="Calibri" pitchFamily="34" charset="-120"/>
-                        </a:rPr>
-                        <a:t>13.2</a:t>
-                      </a:r>
-                      <a:endParaRPr lang="en-US" sz="1250" dirty="0">
-                        <a:latin typeface="Calibri" charset="0"/>
-                        <a:ea typeface="Calibri" charset="0"/>
-                        <a:cs typeface="Calibri" charset="0"/>
-                      </a:endParaRPr>
-                    </a:p>
-                  </a:txBody>
-                  <a:tcPr marL="91440" marR="91440" marT="45720" marB="45720" anchor="ctr">
-                    <a:lnL w="6350" cap="flat" cmpd="sng" algn="ctr">
-                      <a:solidFill>
-                        <a:srgbClr val="DDE5EA"/>
-                      </a:solidFill>
-                      <a:prstDash val="solid"/>
-                      <a:round/>
-                      <a:headEnd type="none" w="med" len="med"/>
-                      <a:tailEnd type="none" w="med" len="med"/>
-                    </a:lnL>
-                    <a:lnR w="6350" cap="flat" cmpd="sng" algn="ctr">
-                      <a:solidFill>
-                        <a:srgbClr val="DDE5EA"/>
-                      </a:solidFill>
-                      <a:prstDash val="solid"/>
-                      <a:round/>
-                      <a:headEnd type="none" w="med" len="med"/>
-                      <a:tailEnd type="none" w="med" len="med"/>
-                    </a:lnR>
-                    <a:lnT w="6350" cap="flat" cmpd="sng" algn="ctr">
-                      <a:solidFill>
-                        <a:srgbClr val="DDE5EA"/>
-                      </a:solidFill>
-                      <a:prstDash val="solid"/>
-                      <a:round/>
-                      <a:headEnd type="none" w="med" len="med"/>
-                      <a:tailEnd type="none" w="med" len="med"/>
-                    </a:lnT>
-                    <a:lnB w="6350" cap="flat" cmpd="sng" algn="ctr">
-                      <a:solidFill>
-                        <a:srgbClr val="DDE5EA"/>
-                      </a:solidFill>
-                      <a:prstDash val="solid"/>
-                      <a:round/>
-                      <a:headEnd type="none" w="med" len="med"/>
-                      <a:tailEnd type="none" w="med" len="med"/>
-                    </a:lnB>
-                  </a:tcPr>
-                </a:tc>
-                <a:tc>
-                  <a:txBody>
-                    <a:bodyPr/>
-                    <a:lstStyle/>
-                    <a:p>
-                      <a:pPr indent="0" marL="0">
-                        <a:buNone/>
-                      </a:pPr>
-                      <a:r>
-                        <a:rPr lang="en-US" sz="1250" dirty="0">
-                          <a:solidFill>
-                            <a:srgbClr val="2B3A44"/>
-                          </a:solidFill>
-                          <a:latin typeface="Calibri" pitchFamily="34" charset="0"/>
-                          <a:ea typeface="Calibri" pitchFamily="34" charset="-122"/>
-                          <a:cs typeface="Calibri" pitchFamily="34" charset="-120"/>
-                        </a:rPr>
-                        <a:t>25.3</a:t>
-                      </a:r>
-                      <a:endParaRPr lang="en-US" sz="1250" dirty="0">
-                        <a:latin typeface="Calibri" charset="0"/>
-                        <a:ea typeface="Calibri" charset="0"/>
-                        <a:cs typeface="Calibri" charset="0"/>
-                      </a:endParaRPr>
-                    </a:p>
-                  </a:txBody>
-                  <a:tcPr marL="91440" marR="91440" marT="45720" marB="45720" anchor="ctr">
-                    <a:lnL w="6350" cap="flat" cmpd="sng" algn="ctr">
-                      <a:solidFill>
-                        <a:srgbClr val="DDE5EA"/>
-                      </a:solidFill>
-                      <a:prstDash val="solid"/>
-                      <a:round/>
-                      <a:headEnd type="none" w="med" len="med"/>
-                      <a:tailEnd type="none" w="med" len="med"/>
-                    </a:lnL>
-                    <a:lnR w="6350" cap="flat" cmpd="sng" algn="ctr">
-                      <a:solidFill>
-                        <a:srgbClr val="DDE5EA"/>
-                      </a:solidFill>
-                      <a:prstDash val="solid"/>
-                      <a:round/>
-                      <a:headEnd type="none" w="med" len="med"/>
-                      <a:tailEnd type="none" w="med" len="med"/>
-                    </a:lnR>
-                    <a:lnT w="6350" cap="flat" cmpd="sng" algn="ctr">
-                      <a:solidFill>
-                        <a:srgbClr val="DDE5EA"/>
-                      </a:solidFill>
-                      <a:prstDash val="solid"/>
-                      <a:round/>
-                      <a:headEnd type="none" w="med" len="med"/>
-                      <a:tailEnd type="none" w="med" len="med"/>
-                    </a:lnT>
-                    <a:lnB w="6350" cap="flat" cmpd="sng" algn="ctr">
-                      <a:solidFill>
-                        <a:srgbClr val="DDE5EA"/>
-                      </a:solidFill>
-                      <a:prstDash val="solid"/>
-                      <a:round/>
-                      <a:headEnd type="none" w="med" len="med"/>
-                      <a:tailEnd type="none" w="med" len="med"/>
-                    </a:lnB>
-                  </a:tcPr>
-                </a:tc>
-                <a:tc>
-                  <a:txBody>
-                    <a:bodyPr/>
-                    <a:lstStyle/>
-                    <a:p>
-                      <a:pPr indent="0" marL="0">
-                        <a:buNone/>
-                      </a:pPr>
-                      <a:r>
-                        <a:rPr lang="en-US" sz="1250" dirty="0">
-                          <a:solidFill>
-                            <a:srgbClr val="2B3A44"/>
-                          </a:solidFill>
-                          <a:latin typeface="Calibri" pitchFamily="34" charset="0"/>
-                          <a:ea typeface="Calibri" pitchFamily="34" charset="-122"/>
-                          <a:cs typeface="Calibri" pitchFamily="34" charset="-120"/>
-                        </a:rPr>
-                        <a:t>0</a:t>
-                      </a:r>
-                      <a:endParaRPr lang="en-US" sz="1250" dirty="0">
-                        <a:latin typeface="Calibri" charset="0"/>
-                        <a:ea typeface="Calibri" charset="0"/>
-                        <a:cs typeface="Calibri" charset="0"/>
-                      </a:endParaRPr>
-                    </a:p>
-                  </a:txBody>
-                  <a:tcPr marL="91440" marR="91440" marT="45720" marB="45720" anchor="ctr">
-                    <a:lnL w="6350" cap="flat" cmpd="sng" algn="ctr">
-                      <a:solidFill>
-                        <a:srgbClr val="DDE5EA"/>
-                      </a:solidFill>
-                      <a:prstDash val="solid"/>
-                      <a:round/>
-                      <a:headEnd type="none" w="med" len="med"/>
-                      <a:tailEnd type="none" w="med" len="med"/>
-                    </a:lnL>
-                    <a:lnR w="6350" cap="flat" cmpd="sng" algn="ctr">
-                      <a:solidFill>
-                        <a:srgbClr val="DDE5EA"/>
-                      </a:solidFill>
-                      <a:prstDash val="solid"/>
-                      <a:round/>
-                      <a:headEnd type="none" w="med" len="med"/>
-                      <a:tailEnd type="none" w="med" len="med"/>
-                    </a:lnR>
-                    <a:lnT w="6350" cap="flat" cmpd="sng" algn="ctr">
-                      <a:solidFill>
-                        <a:srgbClr val="DDE5EA"/>
-                      </a:solidFill>
-                      <a:prstDash val="solid"/>
-                      <a:round/>
-                      <a:headEnd type="none" w="med" len="med"/>
-                      <a:tailEnd type="none" w="med" len="med"/>
-                    </a:lnT>
-                    <a:lnB w="6350" cap="flat" cmpd="sng" algn="ctr">
-                      <a:solidFill>
-                        <a:srgbClr val="DDE5EA"/>
-                      </a:solidFill>
-                      <a:prstDash val="solid"/>
-                      <a:round/>
-                      <a:headEnd type="none" w="med" len="med"/>
-                      <a:tailEnd type="none" w="med" len="med"/>
-                    </a:lnB>
-                  </a:tcPr>
-                </a:tc>
-              </a:tr>
-              <a:tr h="365760">
-                <a:tc>
-                  <a:txBody>
-                    <a:bodyPr/>
-                    <a:lstStyle/>
-                    <a:p>
-                      <a:pPr indent="0" marL="0">
-                        <a:buNone/>
-                      </a:pPr>
-                      <a:r>
-                        <a:rPr lang="en-US" sz="1250" dirty="0">
-                          <a:solidFill>
-                            <a:srgbClr val="2B3A44"/>
-                          </a:solidFill>
-                          <a:latin typeface="Calibri" pitchFamily="34" charset="0"/>
-                          <a:ea typeface="Calibri" pitchFamily="34" charset="-122"/>
-                          <a:cs typeface="Calibri" pitchFamily="34" charset="-120"/>
-                        </a:rPr>
-                        <a:t>50</a:t>
-                      </a:r>
-                      <a:endParaRPr lang="en-US" sz="1250" dirty="0">
-                        <a:latin typeface="Calibri" charset="0"/>
-                        <a:ea typeface="Calibri" charset="0"/>
-                        <a:cs typeface="Calibri" charset="0"/>
-                      </a:endParaRPr>
-                    </a:p>
-                  </a:txBody>
-                  <a:tcPr marL="91440" marR="91440" marT="45720" marB="45720" anchor="ctr">
-                    <a:lnL w="6350" cap="flat" cmpd="sng" algn="ctr">
-                      <a:solidFill>
-                        <a:srgbClr val="DDE5EA"/>
-                      </a:solidFill>
-                      <a:prstDash val="solid"/>
-                      <a:round/>
-                      <a:headEnd type="none" w="med" len="med"/>
-                      <a:tailEnd type="none" w="med" len="med"/>
-                    </a:lnL>
-                    <a:lnR w="6350" cap="flat" cmpd="sng" algn="ctr">
-                      <a:solidFill>
-                        <a:srgbClr val="DDE5EA"/>
-                      </a:solidFill>
-                      <a:prstDash val="solid"/>
-                      <a:round/>
-                      <a:headEnd type="none" w="med" len="med"/>
-                      <a:tailEnd type="none" w="med" len="med"/>
-                    </a:lnR>
-                    <a:lnT w="6350" cap="flat" cmpd="sng" algn="ctr">
-                      <a:solidFill>
-                        <a:srgbClr val="DDE5EA"/>
-                      </a:solidFill>
-                      <a:prstDash val="solid"/>
-                      <a:round/>
-                      <a:headEnd type="none" w="med" len="med"/>
-                      <a:tailEnd type="none" w="med" len="med"/>
-                    </a:lnT>
-                    <a:lnB w="6350" cap="flat" cmpd="sng" algn="ctr">
-                      <a:solidFill>
-                        <a:srgbClr val="DDE5EA"/>
-                      </a:solidFill>
-                      <a:prstDash val="solid"/>
-                      <a:round/>
-                      <a:headEnd type="none" w="med" len="med"/>
-                      <a:tailEnd type="none" w="med" len="med"/>
-                    </a:lnB>
-                  </a:tcPr>
-                </a:tc>
-                <a:tc>
-                  <a:txBody>
-                    <a:bodyPr/>
-                    <a:lstStyle/>
-                    <a:p>
-                      <a:pPr indent="0" marL="0">
-                        <a:buNone/>
-                      </a:pPr>
-                      <a:r>
-                        <a:rPr lang="en-US" sz="1250" dirty="0">
-                          <a:solidFill>
-                            <a:srgbClr val="2B3A44"/>
-                          </a:solidFill>
-                          <a:latin typeface="Calibri" pitchFamily="34" charset="0"/>
-                          <a:ea typeface="Calibri" pitchFamily="34" charset="-122"/>
-                          <a:cs typeface="Calibri" pitchFamily="34" charset="-120"/>
-                        </a:rPr>
-                        <a:t>48.5</a:t>
-                      </a:r>
-                      <a:endParaRPr lang="en-US" sz="1250" dirty="0">
-                        <a:latin typeface="Calibri" charset="0"/>
-                        <a:ea typeface="Calibri" charset="0"/>
-                        <a:cs typeface="Calibri" charset="0"/>
-                      </a:endParaRPr>
-                    </a:p>
-                  </a:txBody>
-                  <a:tcPr marL="91440" marR="91440" marT="45720" marB="45720" anchor="ctr">
-                    <a:lnL w="6350" cap="flat" cmpd="sng" algn="ctr">
-                      <a:solidFill>
-                        <a:srgbClr val="DDE5EA"/>
-                      </a:solidFill>
-                      <a:prstDash val="solid"/>
-                      <a:round/>
-                      <a:headEnd type="none" w="med" len="med"/>
-                      <a:tailEnd type="none" w="med" len="med"/>
-                    </a:lnL>
-                    <a:lnR w="6350" cap="flat" cmpd="sng" algn="ctr">
-                      <a:solidFill>
-                        <a:srgbClr val="DDE5EA"/>
-                      </a:solidFill>
-                      <a:prstDash val="solid"/>
-                      <a:round/>
-                      <a:headEnd type="none" w="med" len="med"/>
-                      <a:tailEnd type="none" w="med" len="med"/>
-                    </a:lnR>
-                    <a:lnT w="6350" cap="flat" cmpd="sng" algn="ctr">
-                      <a:solidFill>
-                        <a:srgbClr val="DDE5EA"/>
-                      </a:solidFill>
-                      <a:prstDash val="solid"/>
-                      <a:round/>
-                      <a:headEnd type="none" w="med" len="med"/>
-                      <a:tailEnd type="none" w="med" len="med"/>
-                    </a:lnT>
-                    <a:lnB w="6350" cap="flat" cmpd="sng" algn="ctr">
-                      <a:solidFill>
-                        <a:srgbClr val="DDE5EA"/>
-                      </a:solidFill>
-                      <a:prstDash val="solid"/>
-                      <a:round/>
-                      <a:headEnd type="none" w="med" len="med"/>
-                      <a:tailEnd type="none" w="med" len="med"/>
-                    </a:lnB>
-                  </a:tcPr>
-                </a:tc>
-                <a:tc>
-                  <a:txBody>
-                    <a:bodyPr/>
-                    <a:lstStyle/>
-                    <a:p>
-                      <a:pPr indent="0" marL="0">
-                        <a:buNone/>
-                      </a:pPr>
-                      <a:r>
-                        <a:rPr lang="en-US" sz="1250" dirty="0">
-                          <a:solidFill>
-                            <a:srgbClr val="2B3A44"/>
-                          </a:solidFill>
-                          <a:latin typeface="Calibri" pitchFamily="34" charset="0"/>
-                          <a:ea typeface="Calibri" pitchFamily="34" charset="-122"/>
-                          <a:cs typeface="Calibri" pitchFamily="34" charset="-120"/>
-                        </a:rPr>
-                        <a:t>10.5</a:t>
-                      </a:r>
-                      <a:endParaRPr lang="en-US" sz="1250" dirty="0">
-                        <a:latin typeface="Calibri" charset="0"/>
-                        <a:ea typeface="Calibri" charset="0"/>
-                        <a:cs typeface="Calibri" charset="0"/>
-                      </a:endParaRPr>
-                    </a:p>
-                  </a:txBody>
-                  <a:tcPr marL="91440" marR="91440" marT="45720" marB="45720" anchor="ctr">
-                    <a:lnL w="6350" cap="flat" cmpd="sng" algn="ctr">
-                      <a:solidFill>
-                        <a:srgbClr val="DDE5EA"/>
-                      </a:solidFill>
-                      <a:prstDash val="solid"/>
-                      <a:round/>
-                      <a:headEnd type="none" w="med" len="med"/>
-                      <a:tailEnd type="none" w="med" len="med"/>
-                    </a:lnL>
-                    <a:lnR w="6350" cap="flat" cmpd="sng" algn="ctr">
-                      <a:solidFill>
-                        <a:srgbClr val="DDE5EA"/>
-                      </a:solidFill>
-                      <a:prstDash val="solid"/>
-                      <a:round/>
-                      <a:headEnd type="none" w="med" len="med"/>
-                      <a:tailEnd type="none" w="med" len="med"/>
-                    </a:lnR>
-                    <a:lnT w="6350" cap="flat" cmpd="sng" algn="ctr">
-                      <a:solidFill>
-                        <a:srgbClr val="DDE5EA"/>
-                      </a:solidFill>
-                      <a:prstDash val="solid"/>
-                      <a:round/>
-                      <a:headEnd type="none" w="med" len="med"/>
-                      <a:tailEnd type="none" w="med" len="med"/>
-                    </a:lnT>
-                    <a:lnB w="6350" cap="flat" cmpd="sng" algn="ctr">
-                      <a:solidFill>
-                        <a:srgbClr val="DDE5EA"/>
-                      </a:solidFill>
-                      <a:prstDash val="solid"/>
-                      <a:round/>
-                      <a:headEnd type="none" w="med" len="med"/>
-                      <a:tailEnd type="none" w="med" len="med"/>
-                    </a:lnB>
-                  </a:tcPr>
-                </a:tc>
-                <a:tc>
-                  <a:txBody>
-                    <a:bodyPr/>
-                    <a:lstStyle/>
-                    <a:p>
-                      <a:pPr indent="0" marL="0">
-                        <a:buNone/>
-                      </a:pPr>
-                      <a:r>
-                        <a:rPr lang="en-US" sz="1250" dirty="0">
-                          <a:solidFill>
-                            <a:srgbClr val="2B3A44"/>
-                          </a:solidFill>
-                          <a:latin typeface="Calibri" pitchFamily="34" charset="0"/>
-                          <a:ea typeface="Calibri" pitchFamily="34" charset="-122"/>
-                          <a:cs typeface="Calibri" pitchFamily="34" charset="-120"/>
-                        </a:rPr>
-                        <a:t>14.5</a:t>
-                      </a:r>
-                      <a:endParaRPr lang="en-US" sz="1250" dirty="0">
-                        <a:latin typeface="Calibri" charset="0"/>
-                        <a:ea typeface="Calibri" charset="0"/>
-                        <a:cs typeface="Calibri" charset="0"/>
-                      </a:endParaRPr>
-                    </a:p>
-                  </a:txBody>
-                  <a:tcPr marL="91440" marR="91440" marT="45720" marB="45720" anchor="ctr">
-                    <a:lnL w="6350" cap="flat" cmpd="sng" algn="ctr">
-                      <a:solidFill>
-                        <a:srgbClr val="DDE5EA"/>
-                      </a:solidFill>
-                      <a:prstDash val="solid"/>
-                      <a:round/>
-                      <a:headEnd type="none" w="med" len="med"/>
-                      <a:tailEnd type="none" w="med" len="med"/>
-                    </a:lnL>
-                    <a:lnR w="6350" cap="flat" cmpd="sng" algn="ctr">
-                      <a:solidFill>
-                        <a:srgbClr val="DDE5EA"/>
-                      </a:solidFill>
-                      <a:prstDash val="solid"/>
-                      <a:round/>
-                      <a:headEnd type="none" w="med" len="med"/>
-                      <a:tailEnd type="none" w="med" len="med"/>
-                    </a:lnR>
-                    <a:lnT w="6350" cap="flat" cmpd="sng" algn="ctr">
-                      <a:solidFill>
-                        <a:srgbClr val="DDE5EA"/>
-                      </a:solidFill>
-                      <a:prstDash val="solid"/>
-                      <a:round/>
-                      <a:headEnd type="none" w="med" len="med"/>
-                      <a:tailEnd type="none" w="med" len="med"/>
-                    </a:lnT>
-                    <a:lnB w="6350" cap="flat" cmpd="sng" algn="ctr">
-                      <a:solidFill>
-                        <a:srgbClr val="DDE5EA"/>
-                      </a:solidFill>
-                      <a:prstDash val="solid"/>
-                      <a:round/>
-                      <a:headEnd type="none" w="med" len="med"/>
-                      <a:tailEnd type="none" w="med" len="med"/>
-                    </a:lnB>
-                  </a:tcPr>
-                </a:tc>
-                <a:tc>
-                  <a:txBody>
-                    <a:bodyPr/>
-                    <a:lstStyle/>
-                    <a:p>
-                      <a:pPr indent="0" marL="0">
-                        <a:buNone/>
-                      </a:pPr>
-                      <a:r>
-                        <a:rPr lang="en-US" sz="1250" dirty="0">
-                          <a:solidFill>
-                            <a:srgbClr val="2B3A44"/>
-                          </a:solidFill>
-                          <a:latin typeface="Calibri" pitchFamily="34" charset="0"/>
-                          <a:ea typeface="Calibri" pitchFamily="34" charset="-122"/>
-                          <a:cs typeface="Calibri" pitchFamily="34" charset="-120"/>
-                        </a:rPr>
-                        <a:t>19.8</a:t>
-                      </a:r>
-                      <a:endParaRPr lang="en-US" sz="1250" dirty="0">
-                        <a:latin typeface="Calibri" charset="0"/>
-                        <a:ea typeface="Calibri" charset="0"/>
-                        <a:cs typeface="Calibri" charset="0"/>
-                      </a:endParaRPr>
-                    </a:p>
-                  </a:txBody>
-                  <a:tcPr marL="91440" marR="91440" marT="45720" marB="45720" anchor="ctr">
-                    <a:lnL w="6350" cap="flat" cmpd="sng" algn="ctr">
-                      <a:solidFill>
-                        <a:srgbClr val="DDE5EA"/>
-                      </a:solidFill>
-                      <a:prstDash val="solid"/>
-                      <a:round/>
-                      <a:headEnd type="none" w="med" len="med"/>
-                      <a:tailEnd type="none" w="med" len="med"/>
-                    </a:lnL>
-                    <a:lnR w="6350" cap="flat" cmpd="sng" algn="ctr">
-                      <a:solidFill>
-                        <a:srgbClr val="DDE5EA"/>
-                      </a:solidFill>
-                      <a:prstDash val="solid"/>
-                      <a:round/>
-                      <a:headEnd type="none" w="med" len="med"/>
-                      <a:tailEnd type="none" w="med" len="med"/>
-                    </a:lnR>
-                    <a:lnT w="6350" cap="flat" cmpd="sng" algn="ctr">
-                      <a:solidFill>
-                        <a:srgbClr val="DDE5EA"/>
-                      </a:solidFill>
-                      <a:prstDash val="solid"/>
-                      <a:round/>
-                      <a:headEnd type="none" w="med" len="med"/>
-                      <a:tailEnd type="none" w="med" len="med"/>
-                    </a:lnT>
-                    <a:lnB w="6350" cap="flat" cmpd="sng" algn="ctr">
-                      <a:solidFill>
-                        <a:srgbClr val="DDE5EA"/>
-                      </a:solidFill>
-                      <a:prstDash val="solid"/>
-                      <a:round/>
-                      <a:headEnd type="none" w="med" len="med"/>
-                      <a:tailEnd type="none" w="med" len="med"/>
-                    </a:lnB>
-                  </a:tcPr>
-                </a:tc>
-                <a:tc>
-                  <a:txBody>
-                    <a:bodyPr/>
-                    <a:lstStyle/>
-                    <a:p>
-                      <a:pPr indent="0" marL="0">
-                        <a:buNone/>
-                      </a:pPr>
-                      <a:r>
-                        <a:rPr lang="en-US" sz="1250" dirty="0">
-                          <a:solidFill>
-                            <a:srgbClr val="2B3A44"/>
-                          </a:solidFill>
-                          <a:latin typeface="Calibri" pitchFamily="34" charset="0"/>
-                          <a:ea typeface="Calibri" pitchFamily="34" charset="-122"/>
-                          <a:cs typeface="Calibri" pitchFamily="34" charset="-120"/>
-                        </a:rPr>
-                        <a:t>0</a:t>
-                      </a:r>
-                      <a:endParaRPr lang="en-US" sz="1250" dirty="0">
-                        <a:latin typeface="Calibri" charset="0"/>
-                        <a:ea typeface="Calibri" charset="0"/>
-                        <a:cs typeface="Calibri" charset="0"/>
-                      </a:endParaRPr>
-                    </a:p>
-                  </a:txBody>
-                  <a:tcPr marL="91440" marR="91440" marT="45720" marB="45720" anchor="ctr">
-                    <a:lnL w="6350" cap="flat" cmpd="sng" algn="ctr">
-                      <a:solidFill>
-                        <a:srgbClr val="DDE5EA"/>
-                      </a:solidFill>
-                      <a:prstDash val="solid"/>
-                      <a:round/>
-                      <a:headEnd type="none" w="med" len="med"/>
-                      <a:tailEnd type="none" w="med" len="med"/>
-                    </a:lnL>
-                    <a:lnR w="6350" cap="flat" cmpd="sng" algn="ctr">
-                      <a:solidFill>
-                        <a:srgbClr val="DDE5EA"/>
-                      </a:solidFill>
-                      <a:prstDash val="solid"/>
-                      <a:round/>
-                      <a:headEnd type="none" w="med" len="med"/>
-                      <a:tailEnd type="none" w="med" len="med"/>
-                    </a:lnR>
-                    <a:lnT w="6350" cap="flat" cmpd="sng" algn="ctr">
-                      <a:solidFill>
-                        <a:srgbClr val="DDE5EA"/>
-                      </a:solidFill>
-                      <a:prstDash val="solid"/>
-                      <a:round/>
-                      <a:headEnd type="none" w="med" len="med"/>
-                      <a:tailEnd type="none" w="med" len="med"/>
-                    </a:lnT>
-                    <a:lnB w="6350" cap="flat" cmpd="sng" algn="ctr">
-                      <a:solidFill>
-                        <a:srgbClr val="DDE5EA"/>
-                      </a:solidFill>
-                      <a:prstDash val="solid"/>
-                      <a:round/>
-                      <a:headEnd type="none" w="med" len="med"/>
-                      <a:tailEnd type="none" w="med" len="med"/>
-                    </a:lnB>
                   </a:tcPr>
                 </a:tc>
               </a:tr>
@@ -6679,7 +5903,7 @@
                           <a:ea typeface="Calibri" pitchFamily="34" charset="-122"/>
                           <a:cs typeface="Calibri" pitchFamily="34" charset="-120"/>
                         </a:rPr>
-                        <a:t>97.6</a:t>
+                        <a:t>98.6</a:t>
                       </a:r>
                       <a:endParaRPr lang="en-US" sz="1250" dirty="0">
                         <a:latin typeface="Calibri" charset="0"/>
@@ -6744,7 +5968,7 @@
                           <a:ea typeface="Calibri" pitchFamily="34" charset="-122"/>
                           <a:cs typeface="Calibri" pitchFamily="34" charset="-120"/>
                         </a:rPr>
-                        <a:t>10.6</a:t>
+                        <a:t>9.8</a:t>
                       </a:r>
                       <a:endParaRPr lang="en-US" sz="1250" dirty="0">
                         <a:latin typeface="Calibri" charset="0"/>
@@ -6809,7 +6033,7 @@
                           <a:ea typeface="Calibri" pitchFamily="34" charset="-122"/>
                           <a:cs typeface="Calibri" pitchFamily="34" charset="-120"/>
                         </a:rPr>
-                        <a:t>14.7</a:t>
+                        <a:t>21.3</a:t>
                       </a:r>
                       <a:endParaRPr lang="en-US" sz="1250" dirty="0">
                         <a:latin typeface="Calibri" charset="0"/>
@@ -6874,7 +6098,7 @@
                           <a:ea typeface="Calibri" pitchFamily="34" charset="-122"/>
                           <a:cs typeface="Calibri" pitchFamily="34" charset="-120"/>
                         </a:rPr>
-                        <a:t>38.1</a:t>
+                        <a:t>6.6</a:t>
                       </a:r>
                       <a:endParaRPr lang="en-US" sz="1250" dirty="0">
                         <a:latin typeface="Calibri" charset="0"/>
@@ -6939,7 +6163,791 @@
                           <a:ea typeface="Calibri" pitchFamily="34" charset="-122"/>
                           <a:cs typeface="Calibri" pitchFamily="34" charset="-120"/>
                         </a:rPr>
-                        <a:t>0</a:t>
+                        <a:t>3 of 3</a:t>
+                      </a:r>
+                      <a:endParaRPr lang="en-US" sz="1250" dirty="0">
+                        <a:latin typeface="Calibri" charset="0"/>
+                        <a:ea typeface="Calibri" charset="0"/>
+                        <a:cs typeface="Calibri" charset="0"/>
+                      </a:endParaRPr>
+                    </a:p>
+                  </a:txBody>
+                  <a:tcPr marL="91440" marR="91440" marT="45720" marB="45720" anchor="ctr">
+                    <a:lnL w="6350" cap="flat" cmpd="sng" algn="ctr">
+                      <a:solidFill>
+                        <a:srgbClr val="DDE5EA"/>
+                      </a:solidFill>
+                      <a:prstDash val="solid"/>
+                      <a:round/>
+                      <a:headEnd type="none" w="med" len="med"/>
+                      <a:tailEnd type="none" w="med" len="med"/>
+                    </a:lnL>
+                    <a:lnR w="6350" cap="flat" cmpd="sng" algn="ctr">
+                      <a:solidFill>
+                        <a:srgbClr val="DDE5EA"/>
+                      </a:solidFill>
+                      <a:prstDash val="solid"/>
+                      <a:round/>
+                      <a:headEnd type="none" w="med" len="med"/>
+                      <a:tailEnd type="none" w="med" len="med"/>
+                    </a:lnR>
+                    <a:lnT w="6350" cap="flat" cmpd="sng" algn="ctr">
+                      <a:solidFill>
+                        <a:srgbClr val="DDE5EA"/>
+                      </a:solidFill>
+                      <a:prstDash val="solid"/>
+                      <a:round/>
+                      <a:headEnd type="none" w="med" len="med"/>
+                      <a:tailEnd type="none" w="med" len="med"/>
+                    </a:lnT>
+                    <a:lnB w="6350" cap="flat" cmpd="sng" algn="ctr">
+                      <a:solidFill>
+                        <a:srgbClr val="DDE5EA"/>
+                      </a:solidFill>
+                      <a:prstDash val="solid"/>
+                      <a:round/>
+                      <a:headEnd type="none" w="med" len="med"/>
+                      <a:tailEnd type="none" w="med" len="med"/>
+                    </a:lnB>
+                  </a:tcPr>
+                </a:tc>
+              </a:tr>
+              <a:tr h="365760">
+                <a:tc>
+                  <a:txBody>
+                    <a:bodyPr/>
+                    <a:lstStyle/>
+                    <a:p>
+                      <a:pPr indent="0" marL="0">
+                        <a:buNone/>
+                      </a:pPr>
+                      <a:r>
+                        <a:rPr lang="en-US" sz="1250" dirty="0">
+                          <a:solidFill>
+                            <a:srgbClr val="2B3A44"/>
+                          </a:solidFill>
+                          <a:latin typeface="Calibri" pitchFamily="34" charset="0"/>
+                          <a:ea typeface="Calibri" pitchFamily="34" charset="-122"/>
+                          <a:cs typeface="Calibri" pitchFamily="34" charset="-120"/>
+                        </a:rPr>
+                        <a:t>200</a:t>
+                      </a:r>
+                      <a:endParaRPr lang="en-US" sz="1250" dirty="0">
+                        <a:latin typeface="Calibri" charset="0"/>
+                        <a:ea typeface="Calibri" charset="0"/>
+                        <a:cs typeface="Calibri" charset="0"/>
+                      </a:endParaRPr>
+                    </a:p>
+                  </a:txBody>
+                  <a:tcPr marL="91440" marR="91440" marT="45720" marB="45720" anchor="ctr">
+                    <a:lnL w="6350" cap="flat" cmpd="sng" algn="ctr">
+                      <a:solidFill>
+                        <a:srgbClr val="DDE5EA"/>
+                      </a:solidFill>
+                      <a:prstDash val="solid"/>
+                      <a:round/>
+                      <a:headEnd type="none" w="med" len="med"/>
+                      <a:tailEnd type="none" w="med" len="med"/>
+                    </a:lnL>
+                    <a:lnR w="6350" cap="flat" cmpd="sng" algn="ctr">
+                      <a:solidFill>
+                        <a:srgbClr val="DDE5EA"/>
+                      </a:solidFill>
+                      <a:prstDash val="solid"/>
+                      <a:round/>
+                      <a:headEnd type="none" w="med" len="med"/>
+                      <a:tailEnd type="none" w="med" len="med"/>
+                    </a:lnR>
+                    <a:lnT w="6350" cap="flat" cmpd="sng" algn="ctr">
+                      <a:solidFill>
+                        <a:srgbClr val="DDE5EA"/>
+                      </a:solidFill>
+                      <a:prstDash val="solid"/>
+                      <a:round/>
+                      <a:headEnd type="none" w="med" len="med"/>
+                      <a:tailEnd type="none" w="med" len="med"/>
+                    </a:lnT>
+                    <a:lnB w="6350" cap="flat" cmpd="sng" algn="ctr">
+                      <a:solidFill>
+                        <a:srgbClr val="DDE5EA"/>
+                      </a:solidFill>
+                      <a:prstDash val="solid"/>
+                      <a:round/>
+                      <a:headEnd type="none" w="med" len="med"/>
+                      <a:tailEnd type="none" w="med" len="med"/>
+                    </a:lnB>
+                  </a:tcPr>
+                </a:tc>
+                <a:tc>
+                  <a:txBody>
+                    <a:bodyPr/>
+                    <a:lstStyle/>
+                    <a:p>
+                      <a:pPr indent="0" marL="0">
+                        <a:buNone/>
+                      </a:pPr>
+                      <a:r>
+                        <a:rPr lang="en-US" sz="1250" dirty="0">
+                          <a:solidFill>
+                            <a:srgbClr val="2B3A44"/>
+                          </a:solidFill>
+                          <a:latin typeface="Calibri" pitchFamily="34" charset="0"/>
+                          <a:ea typeface="Calibri" pitchFamily="34" charset="-122"/>
+                          <a:cs typeface="Calibri" pitchFamily="34" charset="-120"/>
+                        </a:rPr>
+                        <a:t>196.0</a:t>
+                      </a:r>
+                      <a:endParaRPr lang="en-US" sz="1250" dirty="0">
+                        <a:latin typeface="Calibri" charset="0"/>
+                        <a:ea typeface="Calibri" charset="0"/>
+                        <a:cs typeface="Calibri" charset="0"/>
+                      </a:endParaRPr>
+                    </a:p>
+                  </a:txBody>
+                  <a:tcPr marL="91440" marR="91440" marT="45720" marB="45720" anchor="ctr">
+                    <a:lnL w="6350" cap="flat" cmpd="sng" algn="ctr">
+                      <a:solidFill>
+                        <a:srgbClr val="DDE5EA"/>
+                      </a:solidFill>
+                      <a:prstDash val="solid"/>
+                      <a:round/>
+                      <a:headEnd type="none" w="med" len="med"/>
+                      <a:tailEnd type="none" w="med" len="med"/>
+                    </a:lnL>
+                    <a:lnR w="6350" cap="flat" cmpd="sng" algn="ctr">
+                      <a:solidFill>
+                        <a:srgbClr val="DDE5EA"/>
+                      </a:solidFill>
+                      <a:prstDash val="solid"/>
+                      <a:round/>
+                      <a:headEnd type="none" w="med" len="med"/>
+                      <a:tailEnd type="none" w="med" len="med"/>
+                    </a:lnR>
+                    <a:lnT w="6350" cap="flat" cmpd="sng" algn="ctr">
+                      <a:solidFill>
+                        <a:srgbClr val="DDE5EA"/>
+                      </a:solidFill>
+                      <a:prstDash val="solid"/>
+                      <a:round/>
+                      <a:headEnd type="none" w="med" len="med"/>
+                      <a:tailEnd type="none" w="med" len="med"/>
+                    </a:lnT>
+                    <a:lnB w="6350" cap="flat" cmpd="sng" algn="ctr">
+                      <a:solidFill>
+                        <a:srgbClr val="DDE5EA"/>
+                      </a:solidFill>
+                      <a:prstDash val="solid"/>
+                      <a:round/>
+                      <a:headEnd type="none" w="med" len="med"/>
+                      <a:tailEnd type="none" w="med" len="med"/>
+                    </a:lnB>
+                  </a:tcPr>
+                </a:tc>
+                <a:tc>
+                  <a:txBody>
+                    <a:bodyPr/>
+                    <a:lstStyle/>
+                    <a:p>
+                      <a:pPr indent="0" marL="0">
+                        <a:buNone/>
+                      </a:pPr>
+                      <a:r>
+                        <a:rPr lang="en-US" sz="1250" dirty="0">
+                          <a:solidFill>
+                            <a:srgbClr val="2B3A44"/>
+                          </a:solidFill>
+                          <a:latin typeface="Calibri" pitchFamily="34" charset="0"/>
+                          <a:ea typeface="Calibri" pitchFamily="34" charset="-122"/>
+                          <a:cs typeface="Calibri" pitchFamily="34" charset="-120"/>
+                        </a:rPr>
+                        <a:t>10.4</a:t>
+                      </a:r>
+                      <a:endParaRPr lang="en-US" sz="1250" dirty="0">
+                        <a:latin typeface="Calibri" charset="0"/>
+                        <a:ea typeface="Calibri" charset="0"/>
+                        <a:cs typeface="Calibri" charset="0"/>
+                      </a:endParaRPr>
+                    </a:p>
+                  </a:txBody>
+                  <a:tcPr marL="91440" marR="91440" marT="45720" marB="45720" anchor="ctr">
+                    <a:lnL w="6350" cap="flat" cmpd="sng" algn="ctr">
+                      <a:solidFill>
+                        <a:srgbClr val="DDE5EA"/>
+                      </a:solidFill>
+                      <a:prstDash val="solid"/>
+                      <a:round/>
+                      <a:headEnd type="none" w="med" len="med"/>
+                      <a:tailEnd type="none" w="med" len="med"/>
+                    </a:lnL>
+                    <a:lnR w="6350" cap="flat" cmpd="sng" algn="ctr">
+                      <a:solidFill>
+                        <a:srgbClr val="DDE5EA"/>
+                      </a:solidFill>
+                      <a:prstDash val="solid"/>
+                      <a:round/>
+                      <a:headEnd type="none" w="med" len="med"/>
+                      <a:tailEnd type="none" w="med" len="med"/>
+                    </a:lnR>
+                    <a:lnT w="6350" cap="flat" cmpd="sng" algn="ctr">
+                      <a:solidFill>
+                        <a:srgbClr val="DDE5EA"/>
+                      </a:solidFill>
+                      <a:prstDash val="solid"/>
+                      <a:round/>
+                      <a:headEnd type="none" w="med" len="med"/>
+                      <a:tailEnd type="none" w="med" len="med"/>
+                    </a:lnT>
+                    <a:lnB w="6350" cap="flat" cmpd="sng" algn="ctr">
+                      <a:solidFill>
+                        <a:srgbClr val="DDE5EA"/>
+                      </a:solidFill>
+                      <a:prstDash val="solid"/>
+                      <a:round/>
+                      <a:headEnd type="none" w="med" len="med"/>
+                      <a:tailEnd type="none" w="med" len="med"/>
+                    </a:lnB>
+                  </a:tcPr>
+                </a:tc>
+                <a:tc>
+                  <a:txBody>
+                    <a:bodyPr/>
+                    <a:lstStyle/>
+                    <a:p>
+                      <a:pPr indent="0" marL="0">
+                        <a:buNone/>
+                      </a:pPr>
+                      <a:r>
+                        <a:rPr lang="en-US" sz="1250" dirty="0">
+                          <a:solidFill>
+                            <a:srgbClr val="2B3A44"/>
+                          </a:solidFill>
+                          <a:latin typeface="Calibri" pitchFamily="34" charset="0"/>
+                          <a:ea typeface="Calibri" pitchFamily="34" charset="-122"/>
+                          <a:cs typeface="Calibri" pitchFamily="34" charset="-120"/>
+                        </a:rPr>
+                        <a:t>33.2</a:t>
+                      </a:r>
+                      <a:endParaRPr lang="en-US" sz="1250" dirty="0">
+                        <a:latin typeface="Calibri" charset="0"/>
+                        <a:ea typeface="Calibri" charset="0"/>
+                        <a:cs typeface="Calibri" charset="0"/>
+                      </a:endParaRPr>
+                    </a:p>
+                  </a:txBody>
+                  <a:tcPr marL="91440" marR="91440" marT="45720" marB="45720" anchor="ctr">
+                    <a:lnL w="6350" cap="flat" cmpd="sng" algn="ctr">
+                      <a:solidFill>
+                        <a:srgbClr val="DDE5EA"/>
+                      </a:solidFill>
+                      <a:prstDash val="solid"/>
+                      <a:round/>
+                      <a:headEnd type="none" w="med" len="med"/>
+                      <a:tailEnd type="none" w="med" len="med"/>
+                    </a:lnL>
+                    <a:lnR w="6350" cap="flat" cmpd="sng" algn="ctr">
+                      <a:solidFill>
+                        <a:srgbClr val="DDE5EA"/>
+                      </a:solidFill>
+                      <a:prstDash val="solid"/>
+                      <a:round/>
+                      <a:headEnd type="none" w="med" len="med"/>
+                      <a:tailEnd type="none" w="med" len="med"/>
+                    </a:lnR>
+                    <a:lnT w="6350" cap="flat" cmpd="sng" algn="ctr">
+                      <a:solidFill>
+                        <a:srgbClr val="DDE5EA"/>
+                      </a:solidFill>
+                      <a:prstDash val="solid"/>
+                      <a:round/>
+                      <a:headEnd type="none" w="med" len="med"/>
+                      <a:tailEnd type="none" w="med" len="med"/>
+                    </a:lnT>
+                    <a:lnB w="6350" cap="flat" cmpd="sng" algn="ctr">
+                      <a:solidFill>
+                        <a:srgbClr val="DDE5EA"/>
+                      </a:solidFill>
+                      <a:prstDash val="solid"/>
+                      <a:round/>
+                      <a:headEnd type="none" w="med" len="med"/>
+                      <a:tailEnd type="none" w="med" len="med"/>
+                    </a:lnB>
+                  </a:tcPr>
+                </a:tc>
+                <a:tc>
+                  <a:txBody>
+                    <a:bodyPr/>
+                    <a:lstStyle/>
+                    <a:p>
+                      <a:pPr indent="0" marL="0">
+                        <a:buNone/>
+                      </a:pPr>
+                      <a:r>
+                        <a:rPr lang="en-US" sz="1250" dirty="0">
+                          <a:solidFill>
+                            <a:srgbClr val="2B3A44"/>
+                          </a:solidFill>
+                          <a:latin typeface="Calibri" pitchFamily="34" charset="0"/>
+                          <a:ea typeface="Calibri" pitchFamily="34" charset="-122"/>
+                          <a:cs typeface="Calibri" pitchFamily="34" charset="-120"/>
+                        </a:rPr>
+                        <a:t>6.8</a:t>
+                      </a:r>
+                      <a:endParaRPr lang="en-US" sz="1250" dirty="0">
+                        <a:latin typeface="Calibri" charset="0"/>
+                        <a:ea typeface="Calibri" charset="0"/>
+                        <a:cs typeface="Calibri" charset="0"/>
+                      </a:endParaRPr>
+                    </a:p>
+                  </a:txBody>
+                  <a:tcPr marL="91440" marR="91440" marT="45720" marB="45720" anchor="ctr">
+                    <a:lnL w="6350" cap="flat" cmpd="sng" algn="ctr">
+                      <a:solidFill>
+                        <a:srgbClr val="DDE5EA"/>
+                      </a:solidFill>
+                      <a:prstDash val="solid"/>
+                      <a:round/>
+                      <a:headEnd type="none" w="med" len="med"/>
+                      <a:tailEnd type="none" w="med" len="med"/>
+                    </a:lnL>
+                    <a:lnR w="6350" cap="flat" cmpd="sng" algn="ctr">
+                      <a:solidFill>
+                        <a:srgbClr val="DDE5EA"/>
+                      </a:solidFill>
+                      <a:prstDash val="solid"/>
+                      <a:round/>
+                      <a:headEnd type="none" w="med" len="med"/>
+                      <a:tailEnd type="none" w="med" len="med"/>
+                    </a:lnR>
+                    <a:lnT w="6350" cap="flat" cmpd="sng" algn="ctr">
+                      <a:solidFill>
+                        <a:srgbClr val="DDE5EA"/>
+                      </a:solidFill>
+                      <a:prstDash val="solid"/>
+                      <a:round/>
+                      <a:headEnd type="none" w="med" len="med"/>
+                      <a:tailEnd type="none" w="med" len="med"/>
+                    </a:lnT>
+                    <a:lnB w="6350" cap="flat" cmpd="sng" algn="ctr">
+                      <a:solidFill>
+                        <a:srgbClr val="DDE5EA"/>
+                      </a:solidFill>
+                      <a:prstDash val="solid"/>
+                      <a:round/>
+                      <a:headEnd type="none" w="med" len="med"/>
+                      <a:tailEnd type="none" w="med" len="med"/>
+                    </a:lnB>
+                  </a:tcPr>
+                </a:tc>
+                <a:tc>
+                  <a:txBody>
+                    <a:bodyPr/>
+                    <a:lstStyle/>
+                    <a:p>
+                      <a:pPr indent="0" marL="0">
+                        <a:buNone/>
+                      </a:pPr>
+                      <a:r>
+                        <a:rPr lang="en-US" sz="1250" dirty="0">
+                          <a:solidFill>
+                            <a:srgbClr val="2B3A44"/>
+                          </a:solidFill>
+                          <a:latin typeface="Calibri" pitchFamily="34" charset="0"/>
+                          <a:ea typeface="Calibri" pitchFamily="34" charset="-122"/>
+                          <a:cs typeface="Calibri" pitchFamily="34" charset="-120"/>
+                        </a:rPr>
+                        <a:t>3 of 3</a:t>
+                      </a:r>
+                      <a:endParaRPr lang="en-US" sz="1250" dirty="0">
+                        <a:latin typeface="Calibri" charset="0"/>
+                        <a:ea typeface="Calibri" charset="0"/>
+                        <a:cs typeface="Calibri" charset="0"/>
+                      </a:endParaRPr>
+                    </a:p>
+                  </a:txBody>
+                  <a:tcPr marL="91440" marR="91440" marT="45720" marB="45720" anchor="ctr">
+                    <a:lnL w="6350" cap="flat" cmpd="sng" algn="ctr">
+                      <a:solidFill>
+                        <a:srgbClr val="DDE5EA"/>
+                      </a:solidFill>
+                      <a:prstDash val="solid"/>
+                      <a:round/>
+                      <a:headEnd type="none" w="med" len="med"/>
+                      <a:tailEnd type="none" w="med" len="med"/>
+                    </a:lnL>
+                    <a:lnR w="6350" cap="flat" cmpd="sng" algn="ctr">
+                      <a:solidFill>
+                        <a:srgbClr val="DDE5EA"/>
+                      </a:solidFill>
+                      <a:prstDash val="solid"/>
+                      <a:round/>
+                      <a:headEnd type="none" w="med" len="med"/>
+                      <a:tailEnd type="none" w="med" len="med"/>
+                    </a:lnR>
+                    <a:lnT w="6350" cap="flat" cmpd="sng" algn="ctr">
+                      <a:solidFill>
+                        <a:srgbClr val="DDE5EA"/>
+                      </a:solidFill>
+                      <a:prstDash val="solid"/>
+                      <a:round/>
+                      <a:headEnd type="none" w="med" len="med"/>
+                      <a:tailEnd type="none" w="med" len="med"/>
+                    </a:lnT>
+                    <a:lnB w="6350" cap="flat" cmpd="sng" algn="ctr">
+                      <a:solidFill>
+                        <a:srgbClr val="DDE5EA"/>
+                      </a:solidFill>
+                      <a:prstDash val="solid"/>
+                      <a:round/>
+                      <a:headEnd type="none" w="med" len="med"/>
+                      <a:tailEnd type="none" w="med" len="med"/>
+                    </a:lnB>
+                  </a:tcPr>
+                </a:tc>
+              </a:tr>
+              <a:tr h="365760">
+                <a:tc>
+                  <a:txBody>
+                    <a:bodyPr/>
+                    <a:lstStyle/>
+                    <a:p>
+                      <a:pPr indent="0" marL="0">
+                        <a:buNone/>
+                      </a:pPr>
+                      <a:r>
+                        <a:rPr lang="en-US" sz="1250" dirty="0">
+                          <a:solidFill>
+                            <a:srgbClr val="2B3A44"/>
+                          </a:solidFill>
+                          <a:latin typeface="Calibri" pitchFamily="34" charset="0"/>
+                          <a:ea typeface="Calibri" pitchFamily="34" charset="-122"/>
+                          <a:cs typeface="Calibri" pitchFamily="34" charset="-120"/>
+                        </a:rPr>
+                        <a:t>300</a:t>
+                      </a:r>
+                      <a:endParaRPr lang="en-US" sz="1250" dirty="0">
+                        <a:latin typeface="Calibri" charset="0"/>
+                        <a:ea typeface="Calibri" charset="0"/>
+                        <a:cs typeface="Calibri" charset="0"/>
+                      </a:endParaRPr>
+                    </a:p>
+                  </a:txBody>
+                  <a:tcPr marL="91440" marR="91440" marT="45720" marB="45720" anchor="ctr">
+                    <a:lnL w="6350" cap="flat" cmpd="sng" algn="ctr">
+                      <a:solidFill>
+                        <a:srgbClr val="DDE5EA"/>
+                      </a:solidFill>
+                      <a:prstDash val="solid"/>
+                      <a:round/>
+                      <a:headEnd type="none" w="med" len="med"/>
+                      <a:tailEnd type="none" w="med" len="med"/>
+                    </a:lnL>
+                    <a:lnR w="6350" cap="flat" cmpd="sng" algn="ctr">
+                      <a:solidFill>
+                        <a:srgbClr val="DDE5EA"/>
+                      </a:solidFill>
+                      <a:prstDash val="solid"/>
+                      <a:round/>
+                      <a:headEnd type="none" w="med" len="med"/>
+                      <a:tailEnd type="none" w="med" len="med"/>
+                    </a:lnR>
+                    <a:lnT w="6350" cap="flat" cmpd="sng" algn="ctr">
+                      <a:solidFill>
+                        <a:srgbClr val="DDE5EA"/>
+                      </a:solidFill>
+                      <a:prstDash val="solid"/>
+                      <a:round/>
+                      <a:headEnd type="none" w="med" len="med"/>
+                      <a:tailEnd type="none" w="med" len="med"/>
+                    </a:lnT>
+                    <a:lnB w="6350" cap="flat" cmpd="sng" algn="ctr">
+                      <a:solidFill>
+                        <a:srgbClr val="DDE5EA"/>
+                      </a:solidFill>
+                      <a:prstDash val="solid"/>
+                      <a:round/>
+                      <a:headEnd type="none" w="med" len="med"/>
+                      <a:tailEnd type="none" w="med" len="med"/>
+                    </a:lnB>
+                  </a:tcPr>
+                </a:tc>
+                <a:tc>
+                  <a:txBody>
+                    <a:bodyPr/>
+                    <a:lstStyle/>
+                    <a:p>
+                      <a:pPr indent="0" marL="0">
+                        <a:buNone/>
+                      </a:pPr>
+                      <a:r>
+                        <a:rPr lang="en-US" sz="1250" dirty="0">
+                          <a:solidFill>
+                            <a:srgbClr val="2B3A44"/>
+                          </a:solidFill>
+                          <a:latin typeface="Calibri" pitchFamily="34" charset="0"/>
+                          <a:ea typeface="Calibri" pitchFamily="34" charset="-122"/>
+                          <a:cs typeface="Calibri" pitchFamily="34" charset="-120"/>
+                        </a:rPr>
+                        <a:t>293.2</a:t>
+                      </a:r>
+                      <a:endParaRPr lang="en-US" sz="1250" dirty="0">
+                        <a:latin typeface="Calibri" charset="0"/>
+                        <a:ea typeface="Calibri" charset="0"/>
+                        <a:cs typeface="Calibri" charset="0"/>
+                      </a:endParaRPr>
+                    </a:p>
+                  </a:txBody>
+                  <a:tcPr marL="91440" marR="91440" marT="45720" marB="45720" anchor="ctr">
+                    <a:lnL w="6350" cap="flat" cmpd="sng" algn="ctr">
+                      <a:solidFill>
+                        <a:srgbClr val="DDE5EA"/>
+                      </a:solidFill>
+                      <a:prstDash val="solid"/>
+                      <a:round/>
+                      <a:headEnd type="none" w="med" len="med"/>
+                      <a:tailEnd type="none" w="med" len="med"/>
+                    </a:lnL>
+                    <a:lnR w="6350" cap="flat" cmpd="sng" algn="ctr">
+                      <a:solidFill>
+                        <a:srgbClr val="DDE5EA"/>
+                      </a:solidFill>
+                      <a:prstDash val="solid"/>
+                      <a:round/>
+                      <a:headEnd type="none" w="med" len="med"/>
+                      <a:tailEnd type="none" w="med" len="med"/>
+                    </a:lnR>
+                    <a:lnT w="6350" cap="flat" cmpd="sng" algn="ctr">
+                      <a:solidFill>
+                        <a:srgbClr val="DDE5EA"/>
+                      </a:solidFill>
+                      <a:prstDash val="solid"/>
+                      <a:round/>
+                      <a:headEnd type="none" w="med" len="med"/>
+                      <a:tailEnd type="none" w="med" len="med"/>
+                    </a:lnT>
+                    <a:lnB w="6350" cap="flat" cmpd="sng" algn="ctr">
+                      <a:solidFill>
+                        <a:srgbClr val="DDE5EA"/>
+                      </a:solidFill>
+                      <a:prstDash val="solid"/>
+                      <a:round/>
+                      <a:headEnd type="none" w="med" len="med"/>
+                      <a:tailEnd type="none" w="med" len="med"/>
+                    </a:lnB>
+                  </a:tcPr>
+                </a:tc>
+                <a:tc>
+                  <a:txBody>
+                    <a:bodyPr/>
+                    <a:lstStyle/>
+                    <a:p>
+                      <a:pPr indent="0" marL="0">
+                        <a:buNone/>
+                      </a:pPr>
+                      <a:r>
+                        <a:rPr lang="en-US" sz="1250" dirty="0">
+                          <a:solidFill>
+                            <a:srgbClr val="2B3A44"/>
+                          </a:solidFill>
+                          <a:latin typeface="Calibri" pitchFamily="34" charset="0"/>
+                          <a:ea typeface="Calibri" pitchFamily="34" charset="-122"/>
+                          <a:cs typeface="Calibri" pitchFamily="34" charset="-120"/>
+                        </a:rPr>
+                        <a:t>15.0</a:t>
+                      </a:r>
+                      <a:endParaRPr lang="en-US" sz="1250" dirty="0">
+                        <a:latin typeface="Calibri" charset="0"/>
+                        <a:ea typeface="Calibri" charset="0"/>
+                        <a:cs typeface="Calibri" charset="0"/>
+                      </a:endParaRPr>
+                    </a:p>
+                  </a:txBody>
+                  <a:tcPr marL="91440" marR="91440" marT="45720" marB="45720" anchor="ctr">
+                    <a:lnL w="6350" cap="flat" cmpd="sng" algn="ctr">
+                      <a:solidFill>
+                        <a:srgbClr val="DDE5EA"/>
+                      </a:solidFill>
+                      <a:prstDash val="solid"/>
+                      <a:round/>
+                      <a:headEnd type="none" w="med" len="med"/>
+                      <a:tailEnd type="none" w="med" len="med"/>
+                    </a:lnL>
+                    <a:lnR w="6350" cap="flat" cmpd="sng" algn="ctr">
+                      <a:solidFill>
+                        <a:srgbClr val="DDE5EA"/>
+                      </a:solidFill>
+                      <a:prstDash val="solid"/>
+                      <a:round/>
+                      <a:headEnd type="none" w="med" len="med"/>
+                      <a:tailEnd type="none" w="med" len="med"/>
+                    </a:lnR>
+                    <a:lnT w="6350" cap="flat" cmpd="sng" algn="ctr">
+                      <a:solidFill>
+                        <a:srgbClr val="DDE5EA"/>
+                      </a:solidFill>
+                      <a:prstDash val="solid"/>
+                      <a:round/>
+                      <a:headEnd type="none" w="med" len="med"/>
+                      <a:tailEnd type="none" w="med" len="med"/>
+                    </a:lnT>
+                    <a:lnB w="6350" cap="flat" cmpd="sng" algn="ctr">
+                      <a:solidFill>
+                        <a:srgbClr val="DDE5EA"/>
+                      </a:solidFill>
+                      <a:prstDash val="solid"/>
+                      <a:round/>
+                      <a:headEnd type="none" w="med" len="med"/>
+                      <a:tailEnd type="none" w="med" len="med"/>
+                    </a:lnB>
+                  </a:tcPr>
+                </a:tc>
+                <a:tc>
+                  <a:txBody>
+                    <a:bodyPr/>
+                    <a:lstStyle/>
+                    <a:p>
+                      <a:pPr indent="0" marL="0">
+                        <a:buNone/>
+                      </a:pPr>
+                      <a:r>
+                        <a:rPr lang="en-US" sz="1250" dirty="0">
+                          <a:solidFill>
+                            <a:srgbClr val="2B3A44"/>
+                          </a:solidFill>
+                          <a:latin typeface="Calibri" pitchFamily="34" charset="0"/>
+                          <a:ea typeface="Calibri" pitchFamily="34" charset="-122"/>
+                          <a:cs typeface="Calibri" pitchFamily="34" charset="-120"/>
+                        </a:rPr>
+                        <a:t>53.6</a:t>
+                      </a:r>
+                      <a:endParaRPr lang="en-US" sz="1250" dirty="0">
+                        <a:latin typeface="Calibri" charset="0"/>
+                        <a:ea typeface="Calibri" charset="0"/>
+                        <a:cs typeface="Calibri" charset="0"/>
+                      </a:endParaRPr>
+                    </a:p>
+                  </a:txBody>
+                  <a:tcPr marL="91440" marR="91440" marT="45720" marB="45720" anchor="ctr">
+                    <a:lnL w="6350" cap="flat" cmpd="sng" algn="ctr">
+                      <a:solidFill>
+                        <a:srgbClr val="DDE5EA"/>
+                      </a:solidFill>
+                      <a:prstDash val="solid"/>
+                      <a:round/>
+                      <a:headEnd type="none" w="med" len="med"/>
+                      <a:tailEnd type="none" w="med" len="med"/>
+                    </a:lnL>
+                    <a:lnR w="6350" cap="flat" cmpd="sng" algn="ctr">
+                      <a:solidFill>
+                        <a:srgbClr val="DDE5EA"/>
+                      </a:solidFill>
+                      <a:prstDash val="solid"/>
+                      <a:round/>
+                      <a:headEnd type="none" w="med" len="med"/>
+                      <a:tailEnd type="none" w="med" len="med"/>
+                    </a:lnR>
+                    <a:lnT w="6350" cap="flat" cmpd="sng" algn="ctr">
+                      <a:solidFill>
+                        <a:srgbClr val="DDE5EA"/>
+                      </a:solidFill>
+                      <a:prstDash val="solid"/>
+                      <a:round/>
+                      <a:headEnd type="none" w="med" len="med"/>
+                      <a:tailEnd type="none" w="med" len="med"/>
+                    </a:lnT>
+                    <a:lnB w="6350" cap="flat" cmpd="sng" algn="ctr">
+                      <a:solidFill>
+                        <a:srgbClr val="DDE5EA"/>
+                      </a:solidFill>
+                      <a:prstDash val="solid"/>
+                      <a:round/>
+                      <a:headEnd type="none" w="med" len="med"/>
+                      <a:tailEnd type="none" w="med" len="med"/>
+                    </a:lnB>
+                  </a:tcPr>
+                </a:tc>
+                <a:tc>
+                  <a:txBody>
+                    <a:bodyPr/>
+                    <a:lstStyle/>
+                    <a:p>
+                      <a:pPr indent="0" marL="0">
+                        <a:buNone/>
+                      </a:pPr>
+                      <a:r>
+                        <a:rPr lang="en-US" sz="1250" dirty="0">
+                          <a:solidFill>
+                            <a:srgbClr val="2B3A44"/>
+                          </a:solidFill>
+                          <a:latin typeface="Calibri" pitchFamily="34" charset="0"/>
+                          <a:ea typeface="Calibri" pitchFamily="34" charset="-122"/>
+                          <a:cs typeface="Calibri" pitchFamily="34" charset="-120"/>
+                        </a:rPr>
+                        <a:t>10.5</a:t>
+                      </a:r>
+                      <a:endParaRPr lang="en-US" sz="1250" dirty="0">
+                        <a:latin typeface="Calibri" charset="0"/>
+                        <a:ea typeface="Calibri" charset="0"/>
+                        <a:cs typeface="Calibri" charset="0"/>
+                      </a:endParaRPr>
+                    </a:p>
+                  </a:txBody>
+                  <a:tcPr marL="91440" marR="91440" marT="45720" marB="45720" anchor="ctr">
+                    <a:lnL w="6350" cap="flat" cmpd="sng" algn="ctr">
+                      <a:solidFill>
+                        <a:srgbClr val="DDE5EA"/>
+                      </a:solidFill>
+                      <a:prstDash val="solid"/>
+                      <a:round/>
+                      <a:headEnd type="none" w="med" len="med"/>
+                      <a:tailEnd type="none" w="med" len="med"/>
+                    </a:lnL>
+                    <a:lnR w="6350" cap="flat" cmpd="sng" algn="ctr">
+                      <a:solidFill>
+                        <a:srgbClr val="DDE5EA"/>
+                      </a:solidFill>
+                      <a:prstDash val="solid"/>
+                      <a:round/>
+                      <a:headEnd type="none" w="med" len="med"/>
+                      <a:tailEnd type="none" w="med" len="med"/>
+                    </a:lnR>
+                    <a:lnT w="6350" cap="flat" cmpd="sng" algn="ctr">
+                      <a:solidFill>
+                        <a:srgbClr val="DDE5EA"/>
+                      </a:solidFill>
+                      <a:prstDash val="solid"/>
+                      <a:round/>
+                      <a:headEnd type="none" w="med" len="med"/>
+                      <a:tailEnd type="none" w="med" len="med"/>
+                    </a:lnT>
+                    <a:lnB w="6350" cap="flat" cmpd="sng" algn="ctr">
+                      <a:solidFill>
+                        <a:srgbClr val="DDE5EA"/>
+                      </a:solidFill>
+                      <a:prstDash val="solid"/>
+                      <a:round/>
+                      <a:headEnd type="none" w="med" len="med"/>
+                      <a:tailEnd type="none" w="med" len="med"/>
+                    </a:lnB>
+                  </a:tcPr>
+                </a:tc>
+                <a:tc>
+                  <a:txBody>
+                    <a:bodyPr/>
+                    <a:lstStyle/>
+                    <a:p>
+                      <a:pPr indent="0" marL="0">
+                        <a:buNone/>
+                      </a:pPr>
+                      <a:r>
+                        <a:rPr lang="en-US" sz="1250" dirty="0">
+                          <a:solidFill>
+                            <a:srgbClr val="2B3A44"/>
+                          </a:solidFill>
+                          <a:latin typeface="Calibri" pitchFamily="34" charset="0"/>
+                          <a:ea typeface="Calibri" pitchFamily="34" charset="-122"/>
+                          <a:cs typeface="Calibri" pitchFamily="34" charset="-120"/>
+                        </a:rPr>
+                        <a:t>3 of 3</a:t>
                       </a:r>
                       <a:endParaRPr lang="en-US" sz="1250" dirty="0">
                         <a:latin typeface="Calibri" charset="0"/>
@@ -7006,7 +7014,7 @@
                           <a:ea typeface="Calibri" pitchFamily="34" charset="-122"/>
                           <a:cs typeface="Calibri" pitchFamily="34" charset="-120"/>
                         </a:rPr>
-                        <a:t>200</a:t>
+                        <a:t>350</a:t>
                       </a:r>
                       <a:endParaRPr lang="en-US" sz="1250" dirty="0">
                         <a:latin typeface="Calibri" charset="0"/>
@@ -7071,7 +7079,7 @@
                           <a:ea typeface="Calibri" pitchFamily="34" charset="-122"/>
                           <a:cs typeface="Calibri" pitchFamily="34" charset="-120"/>
                         </a:rPr>
-                        <a:t>197.7</a:t>
+                        <a:t>343.2</a:t>
                       </a:r>
                       <a:endParaRPr lang="en-US" sz="1250" dirty="0">
                         <a:latin typeface="Calibri" charset="0"/>
@@ -7136,7 +7144,7 @@
                           <a:ea typeface="Calibri" pitchFamily="34" charset="-122"/>
                           <a:cs typeface="Calibri" pitchFamily="34" charset="-120"/>
                         </a:rPr>
-                        <a:t>21.7</a:t>
+                        <a:t>38.6</a:t>
                       </a:r>
                       <a:endParaRPr lang="en-US" sz="1250" dirty="0">
                         <a:latin typeface="Calibri" charset="0"/>
@@ -7201,7 +7209,7 @@
                           <a:ea typeface="Calibri" pitchFamily="34" charset="-122"/>
                           <a:cs typeface="Calibri" pitchFamily="34" charset="-120"/>
                         </a:rPr>
-                        <a:t>37.8</a:t>
+                        <a:t>326</a:t>
                       </a:r>
                       <a:endParaRPr lang="en-US" sz="1250" dirty="0">
                         <a:latin typeface="Calibri" charset="0"/>
@@ -7266,7 +7274,7 @@
                           <a:ea typeface="Calibri" pitchFamily="34" charset="-122"/>
                           <a:cs typeface="Calibri" pitchFamily="34" charset="-120"/>
                         </a:rPr>
-                        <a:t>60.8</a:t>
+                        <a:t>29.2</a:t>
                       </a:r>
                       <a:endParaRPr lang="en-US" sz="1250" dirty="0">
                         <a:latin typeface="Calibri" charset="0"/>
@@ -7331,7 +7339,7 @@
                           <a:ea typeface="Calibri" pitchFamily="34" charset="-122"/>
                           <a:cs typeface="Calibri" pitchFamily="34" charset="-120"/>
                         </a:rPr>
-                        <a:t>0</a:t>
+                        <a:t>2 of 3</a:t>
                       </a:r>
                       <a:endParaRPr lang="en-US" sz="1250" dirty="0">
                         <a:latin typeface="Calibri" charset="0"/>
@@ -7420,7 +7428,7 @@
                 <a:ea typeface="Calibri" pitchFamily="34" charset="-122"/>
                 <a:cs typeface="Calibri" pitchFamily="34" charset="-120"/>
               </a:rPr>
-              <a:t>Capacity is between 200 and 300 rps, and the failure is a cliff, not a slope. </a:t>
+              <a:t>Flat to 250 rps - p50 under 12 ms, p99 under 50, nothing erroring. 300 is the edge. </a:t>
             </a:r>
             <a:pPr indent="0" marL="0">
               <a:lnSpc>
@@ -7437,7 +7445,7 @@
                 <a:ea typeface="Calibri" pitchFamily="34" charset="-122"/>
                 <a:cs typeface="Calibri" pitchFamily="34" charset="-120"/>
               </a:rPr>
-              <a:t>At a 300 rps target the server delivers 130 and p50 goes to 6.6 seconds; at 400 it delivers 73. Nothing errors — requests are accepted and then queue, which is the worst shape for a page load and exactly what an open loop is for. Latency milliseconds, 20 s per rate after a 5 s warm-up.</a:t>
+              <a:t>Medians of three identical sweeps, because one sweep is not a measurement: at 300, two runs gave p99 48-54 ms and a third gave 750. At 350 the generator itself fails once in three and at 400 always - three workers and three generators want more than four cores. Plan on 250 a box, a floor not a ceiling.</a:t>
             </a:r>
             <a:endParaRPr lang="en-US" sz="1250" dirty="0"/>
           </a:p>

--- a/docs/BL_ranking_part2.pptx
+++ b/docs/BL_ranking_part2.pptx
@@ -2509,7 +2509,7 @@
                 <a:ea typeface="Cambria" pitchFamily="34" charset="-122"/>
                 <a:cs typeface="Cambria" pitchFamily="34" charset="-120"/>
               </a:rPr>
-              <a:t>60 ms  </a:t>
+              <a:t>67 ms  </a:t>
             </a:r>
             <a:pPr indent="0" marL="0">
               <a:buNone/>
@@ -2523,7 +2523,7 @@
                 <a:ea typeface="Cambria" pitchFamily="34" charset="-122"/>
                 <a:cs typeface="Cambria" pitchFamily="34" charset="-120"/>
               </a:rPr>
-              <a:t>→ 2.4 ms</a:t>
+              <a:t>→ 2.7 ms</a:t>
             </a:r>
             <a:endParaRPr lang="en-US" sz="2000" dirty="0"/>
           </a:p>
@@ -2601,7 +2601,7 @@
                 <a:ea typeface="Cambria" pitchFamily="34" charset="-122"/>
                 <a:cs typeface="Cambria" pitchFamily="34" charset="-120"/>
               </a:rPr>
-              <a:t>18.6 s  </a:t>
+              <a:t>9.5 s  </a:t>
             </a:r>
             <a:pPr indent="0" marL="0">
               <a:buNone/>
@@ -2615,7 +2615,7 @@
                 <a:ea typeface="Cambria" pitchFamily="34" charset="-122"/>
                 <a:cs typeface="Cambria" pitchFamily="34" charset="-120"/>
               </a:rPr>
-              <a:t>→ 3.9 s</a:t>
+              <a:t>→ 3.6 s</a:t>
             </a:r>
             <a:endParaRPr lang="en-US" sz="2000" dirty="0"/>
           </a:p>
@@ -2693,7 +2693,7 @@
                 <a:ea typeface="Cambria" pitchFamily="34" charset="-122"/>
                 <a:cs typeface="Cambria" pitchFamily="34" charset="-120"/>
               </a:rPr>
-              <a:t>2.4 GB  </a:t>
+              <a:t>2.1 GB  </a:t>
             </a:r>
             <a:pPr indent="0" marL="0">
               <a:buNone/>
@@ -2707,7 +2707,7 @@
                 <a:ea typeface="Cambria" pitchFamily="34" charset="-122"/>
                 <a:cs typeface="Cambria" pitchFamily="34" charset="-120"/>
               </a:rPr>
-              <a:t>→ 290 MB</a:t>
+              <a:t>→ 357 MB</a:t>
             </a:r>
             <a:endParaRPr lang="en-US" sz="2000" dirty="0"/>
           </a:p>
@@ -2803,6 +2803,10 @@
           </a:solidFill>
           <a:ln/>
         </p:spPr>
+        <p:txBody>
+          <a:bodyPr/>
+          <a:p/>
+        </p:txBody>
       </p:sp>
       <p:sp>
         <p:nvSpPr>
@@ -2876,7 +2880,7 @@
                 <a:ea typeface="Cambria" pitchFamily="34" charset="-122"/>
                 <a:cs typeface="Cambria" pitchFamily="34" charset="-120"/>
               </a:rPr>
-              <a:t>The 2.4 GB import</a:t>
+              <a:t>The 2.1 GB import</a:t>
             </a:r>
             <a:endParaRPr lang="en-US" sz="3000" dirty="0"/>
           </a:p>
@@ -2947,6 +2951,10 @@
             <a:prstDash val="solid"/>
           </a:ln>
         </p:spPr>
+        <p:txBody>
+          <a:bodyPr/>
+          <a:p/>
+        </p:txBody>
       </p:sp>
       <p:sp>
         <p:nvSpPr>
@@ -3472,7 +3480,7 @@
                           <a:ea typeface="Calibri" pitchFamily="34" charset="-122"/>
                           <a:cs typeface="Calibri" pitchFamily="34" charset="-120"/>
                         </a:rPr>
-                        <a:t>18.6 s</a:t>
+                        <a:t>9.5 s</a:t>
                       </a:r>
                       <a:endParaRPr lang="en-US" sz="1250" dirty="0">
                         <a:latin typeface="Calibri" charset="0"/>
@@ -3537,7 +3545,7 @@
                           <a:ea typeface="Calibri" pitchFamily="34" charset="-122"/>
                           <a:cs typeface="Calibri" pitchFamily="34" charset="-120"/>
                         </a:rPr>
-                        <a:t>2.4 GB</a:t>
+                        <a:t>2.1 GB</a:t>
                       </a:r>
                       <a:endParaRPr lang="en-US" sz="1250" dirty="0">
                         <a:latin typeface="Calibri" charset="0"/>
@@ -3602,7 +3610,7 @@
                           <a:ea typeface="Calibri" pitchFamily="34" charset="-122"/>
                           <a:cs typeface="Calibri" pitchFamily="34" charset="-120"/>
                         </a:rPr>
-                        <a:t>77 µs</a:t>
+                        <a:t>49 µs</a:t>
                       </a:r>
                       <a:endParaRPr lang="en-US" sz="1250" dirty="0">
                         <a:latin typeface="Calibri" charset="0"/>
@@ -3799,7 +3807,7 @@
                           <a:ea typeface="Calibri" pitchFamily="34" charset="-122"/>
                           <a:cs typeface="Calibri" pitchFamily="34" charset="-120"/>
                         </a:rPr>
-                        <a:t>3.9 s</a:t>
+                        <a:t>3.6 s</a:t>
                       </a:r>
                       <a:endParaRPr lang="en-US" sz="1250" dirty="0">
                         <a:latin typeface="Calibri" charset="0"/>
@@ -3864,7 +3872,7 @@
                           <a:ea typeface="Calibri" pitchFamily="34" charset="-122"/>
                           <a:cs typeface="Calibri" pitchFamily="34" charset="-120"/>
                         </a:rPr>
-                        <a:t>290 MB</a:t>
+                        <a:t>357 MB</a:t>
                       </a:r>
                       <a:endParaRPr lang="en-US" sz="1250" dirty="0">
                         <a:latin typeface="Calibri" charset="0"/>
@@ -3929,7 +3937,7 @@
                           <a:ea typeface="Calibri" pitchFamily="34" charset="-122"/>
                           <a:cs typeface="Calibri" pitchFamily="34" charset="-120"/>
                         </a:rPr>
-                        <a:t>0.09 µs</a:t>
+                        <a:t>0.6 µs</a:t>
                       </a:r>
                       <a:endParaRPr lang="en-US" sz="1250" dirty="0">
                         <a:latin typeface="Calibri" charset="0"/>
@@ -4115,6 +4123,10 @@
             <a:prstDash val="solid"/>
           </a:ln>
         </p:spPr>
+        <p:txBody>
+          <a:bodyPr/>
+          <a:p/>
+        </p:txBody>
       </p:sp>
       <p:sp>
         <p:nvSpPr>
@@ -4209,6 +4221,10 @@
           </a:solidFill>
           <a:ln/>
         </p:spPr>
+        <p:txBody>
+          <a:bodyPr/>
+          <a:p/>
+        </p:txBody>
       </p:sp>
       <p:sp>
         <p:nvSpPr>
@@ -4351,6 +4367,10 @@
             <a:prstDash val="solid"/>
           </a:ln>
         </p:spPr>
+        <p:txBody>
+          <a:bodyPr/>
+          <a:p/>
+        </p:txBody>
       </p:sp>
       <p:sp>
         <p:nvSpPr>
@@ -4460,6 +4480,10 @@
             <a:prstDash val="solid"/>
           </a:ln>
         </p:spPr>
+        <p:txBody>
+          <a:bodyPr/>
+          <a:p/>
+        </p:txBody>
       </p:sp>
       <p:sp>
         <p:nvSpPr>
@@ -4569,6 +4593,10 @@
             <a:prstDash val="solid"/>
           </a:ln>
         </p:spPr>
+        <p:txBody>
+          <a:bodyPr/>
+          <a:p/>
+        </p:txBody>
       </p:sp>
       <p:sp>
         <p:nvSpPr>
@@ -4678,6 +4706,10 @@
             <a:prstDash val="solid"/>
           </a:ln>
         </p:spPr>
+        <p:txBody>
+          <a:bodyPr/>
+          <a:p/>
+        </p:txBody>
       </p:sp>
       <p:sp>
         <p:nvSpPr>
@@ -4787,6 +4819,10 @@
             <a:prstDash val="solid"/>
           </a:ln>
         </p:spPr>
+        <p:txBody>
+          <a:bodyPr/>
+          <a:p/>
+        </p:txBody>
       </p:sp>
       <p:sp>
         <p:nvSpPr>
@@ -5956,25 +5992,9 @@
                     <a:bodyPr/>
                     <a:lstStyle/>
                     <a:p>
-                      <a:pPr indent="0" marL="0">
-                        <a:buNone/>
-                      </a:pPr>
                       <a:r>
-                        <a:rPr lang="en-US" sz="1250" dirty="0">
-                          <a:solidFill>
-                            <a:srgbClr val="2B3A44"/>
-                          </a:solidFill>
-                          <a:latin typeface="Calibri" pitchFamily="34" charset="0"/>
-                          <a:ea typeface="Calibri" pitchFamily="34" charset="-122"/>
-                          <a:cs typeface="Calibri" pitchFamily="34" charset="-120"/>
-                        </a:rPr>
-                        <a:t>9.8</a:t>
+                        <a:t>10.0</a:t>
                       </a:r>
-                      <a:endParaRPr lang="en-US" sz="1250" dirty="0">
-                        <a:latin typeface="Calibri" charset="0"/>
-                        <a:ea typeface="Calibri" charset="0"/>
-                        <a:cs typeface="Calibri" charset="0"/>
-                      </a:endParaRPr>
                     </a:p>
                   </a:txBody>
                   <a:tcPr marL="91440" marR="91440" marT="45720" marB="45720" anchor="ctr">
@@ -6021,25 +6041,9 @@
                     <a:bodyPr/>
                     <a:lstStyle/>
                     <a:p>
-                      <a:pPr indent="0" marL="0">
-                        <a:buNone/>
-                      </a:pPr>
                       <a:r>
-                        <a:rPr lang="en-US" sz="1250" dirty="0">
-                          <a:solidFill>
-                            <a:srgbClr val="2B3A44"/>
-                          </a:solidFill>
-                          <a:latin typeface="Calibri" pitchFamily="34" charset="0"/>
-                          <a:ea typeface="Calibri" pitchFamily="34" charset="-122"/>
-                          <a:cs typeface="Calibri" pitchFamily="34" charset="-120"/>
-                        </a:rPr>
-                        <a:t>21.3</a:t>
+                        <a:t>55.9</a:t>
                       </a:r>
-                      <a:endParaRPr lang="en-US" sz="1250" dirty="0">
-                        <a:latin typeface="Calibri" charset="0"/>
-                        <a:ea typeface="Calibri" charset="0"/>
-                        <a:cs typeface="Calibri" charset="0"/>
-                      </a:endParaRPr>
                     </a:p>
                   </a:txBody>
                   <a:tcPr marL="91440" marR="91440" marT="45720" marB="45720" anchor="ctr">
@@ -6086,25 +6090,9 @@
                     <a:bodyPr/>
                     <a:lstStyle/>
                     <a:p>
-                      <a:pPr indent="0" marL="0">
-                        <a:buNone/>
-                      </a:pPr>
                       <a:r>
-                        <a:rPr lang="en-US" sz="1250" dirty="0">
-                          <a:solidFill>
-                            <a:srgbClr val="2B3A44"/>
-                          </a:solidFill>
-                          <a:latin typeface="Calibri" pitchFamily="34" charset="0"/>
-                          <a:ea typeface="Calibri" pitchFamily="34" charset="-122"/>
-                          <a:cs typeface="Calibri" pitchFamily="34" charset="-120"/>
-                        </a:rPr>
-                        <a:t>6.6</a:t>
+                        <a:t>9.3</a:t>
                       </a:r>
-                      <a:endParaRPr lang="en-US" sz="1250" dirty="0">
-                        <a:latin typeface="Calibri" charset="0"/>
-                        <a:ea typeface="Calibri" charset="0"/>
-                        <a:cs typeface="Calibri" charset="0"/>
-                      </a:endParaRPr>
                     </a:p>
                   </a:txBody>
                   <a:tcPr marL="91440" marR="91440" marT="45720" marB="45720" anchor="ctr">
@@ -6348,25 +6336,9 @@
                     <a:bodyPr/>
                     <a:lstStyle/>
                     <a:p>
-                      <a:pPr indent="0" marL="0">
-                        <a:buNone/>
-                      </a:pPr>
                       <a:r>
-                        <a:rPr lang="en-US" sz="1250" dirty="0">
-                          <a:solidFill>
-                            <a:srgbClr val="2B3A44"/>
-                          </a:solidFill>
-                          <a:latin typeface="Calibri" pitchFamily="34" charset="0"/>
-                          <a:ea typeface="Calibri" pitchFamily="34" charset="-122"/>
-                          <a:cs typeface="Calibri" pitchFamily="34" charset="-120"/>
-                        </a:rPr>
-                        <a:t>10.4</a:t>
+                        <a:t>11.3</a:t>
                       </a:r>
-                      <a:endParaRPr lang="en-US" sz="1250" dirty="0">
-                        <a:latin typeface="Calibri" charset="0"/>
-                        <a:ea typeface="Calibri" charset="0"/>
-                        <a:cs typeface="Calibri" charset="0"/>
-                      </a:endParaRPr>
                     </a:p>
                   </a:txBody>
                   <a:tcPr marL="91440" marR="91440" marT="45720" marB="45720" anchor="ctr">
@@ -6413,25 +6385,9 @@
                     <a:bodyPr/>
                     <a:lstStyle/>
                     <a:p>
-                      <a:pPr indent="0" marL="0">
-                        <a:buNone/>
-                      </a:pPr>
                       <a:r>
-                        <a:rPr lang="en-US" sz="1250" dirty="0">
-                          <a:solidFill>
-                            <a:srgbClr val="2B3A44"/>
-                          </a:solidFill>
-                          <a:latin typeface="Calibri" pitchFamily="34" charset="0"/>
-                          <a:ea typeface="Calibri" pitchFamily="34" charset="-122"/>
-                          <a:cs typeface="Calibri" pitchFamily="34" charset="-120"/>
-                        </a:rPr>
-                        <a:t>33.2</a:t>
+                        <a:t>55.4</a:t>
                       </a:r>
-                      <a:endParaRPr lang="en-US" sz="1250" dirty="0">
-                        <a:latin typeface="Calibri" charset="0"/>
-                        <a:ea typeface="Calibri" charset="0"/>
-                        <a:cs typeface="Calibri" charset="0"/>
-                      </a:endParaRPr>
                     </a:p>
                   </a:txBody>
                   <a:tcPr marL="91440" marR="91440" marT="45720" marB="45720" anchor="ctr">
@@ -6478,25 +6434,9 @@
                     <a:bodyPr/>
                     <a:lstStyle/>
                     <a:p>
-                      <a:pPr indent="0" marL="0">
-                        <a:buNone/>
-                      </a:pPr>
                       <a:r>
-                        <a:rPr lang="en-US" sz="1250" dirty="0">
-                          <a:solidFill>
-                            <a:srgbClr val="2B3A44"/>
-                          </a:solidFill>
-                          <a:latin typeface="Calibri" pitchFamily="34" charset="0"/>
-                          <a:ea typeface="Calibri" pitchFamily="34" charset="-122"/>
-                          <a:cs typeface="Calibri" pitchFamily="34" charset="-120"/>
-                        </a:rPr>
-                        <a:t>6.8</a:t>
+                        <a:t>10.6</a:t>
                       </a:r>
-                      <a:endParaRPr lang="en-US" sz="1250" dirty="0">
-                        <a:latin typeface="Calibri" charset="0"/>
-                        <a:ea typeface="Calibri" charset="0"/>
-                        <a:cs typeface="Calibri" charset="0"/>
-                      </a:endParaRPr>
                     </a:p>
                   </a:txBody>
                   <a:tcPr marL="91440" marR="91440" marT="45720" marB="45720" anchor="ctr">
@@ -6675,25 +6615,9 @@
                     <a:bodyPr/>
                     <a:lstStyle/>
                     <a:p>
-                      <a:pPr indent="0" marL="0">
-                        <a:buNone/>
-                      </a:pPr>
                       <a:r>
-                        <a:rPr lang="en-US" sz="1250" dirty="0">
-                          <a:solidFill>
-                            <a:srgbClr val="2B3A44"/>
-                          </a:solidFill>
-                          <a:latin typeface="Calibri" pitchFamily="34" charset="0"/>
-                          <a:ea typeface="Calibri" pitchFamily="34" charset="-122"/>
-                          <a:cs typeface="Calibri" pitchFamily="34" charset="-120"/>
-                        </a:rPr>
-                        <a:t>293.2</a:t>
+                        <a:t>293.3</a:t>
                       </a:r>
-                      <a:endParaRPr lang="en-US" sz="1250" dirty="0">
-                        <a:latin typeface="Calibri" charset="0"/>
-                        <a:ea typeface="Calibri" charset="0"/>
-                        <a:cs typeface="Calibri" charset="0"/>
-                      </a:endParaRPr>
                     </a:p>
                   </a:txBody>
                   <a:tcPr marL="91440" marR="91440" marT="45720" marB="45720" anchor="ctr">
@@ -6740,25 +6664,9 @@
                     <a:bodyPr/>
                     <a:lstStyle/>
                     <a:p>
-                      <a:pPr indent="0" marL="0">
-                        <a:buNone/>
-                      </a:pPr>
                       <a:r>
-                        <a:rPr lang="en-US" sz="1250" dirty="0">
-                          <a:solidFill>
-                            <a:srgbClr val="2B3A44"/>
-                          </a:solidFill>
-                          <a:latin typeface="Calibri" pitchFamily="34" charset="0"/>
-                          <a:ea typeface="Calibri" pitchFamily="34" charset="-122"/>
-                          <a:cs typeface="Calibri" pitchFamily="34" charset="-120"/>
-                        </a:rPr>
-                        <a:t>15.0</a:t>
+                        <a:t>12.5</a:t>
                       </a:r>
-                      <a:endParaRPr lang="en-US" sz="1250" dirty="0">
-                        <a:latin typeface="Calibri" charset="0"/>
-                        <a:ea typeface="Calibri" charset="0"/>
-                        <a:cs typeface="Calibri" charset="0"/>
-                      </a:endParaRPr>
                     </a:p>
                   </a:txBody>
                   <a:tcPr marL="91440" marR="91440" marT="45720" marB="45720" anchor="ctr">
@@ -6805,25 +6713,9 @@
                     <a:bodyPr/>
                     <a:lstStyle/>
                     <a:p>
-                      <a:pPr indent="0" marL="0">
-                        <a:buNone/>
-                      </a:pPr>
                       <a:r>
-                        <a:rPr lang="en-US" sz="1250" dirty="0">
-                          <a:solidFill>
-                            <a:srgbClr val="2B3A44"/>
-                          </a:solidFill>
-                          <a:latin typeface="Calibri" pitchFamily="34" charset="0"/>
-                          <a:ea typeface="Calibri" pitchFamily="34" charset="-122"/>
-                          <a:cs typeface="Calibri" pitchFamily="34" charset="-120"/>
-                        </a:rPr>
-                        <a:t>53.6</a:t>
+                        <a:t>80.7</a:t>
                       </a:r>
-                      <a:endParaRPr lang="en-US" sz="1250" dirty="0">
-                        <a:latin typeface="Calibri" charset="0"/>
-                        <a:ea typeface="Calibri" charset="0"/>
-                        <a:cs typeface="Calibri" charset="0"/>
-                      </a:endParaRPr>
                     </a:p>
                   </a:txBody>
                   <a:tcPr marL="91440" marR="91440" marT="45720" marB="45720" anchor="ctr">
@@ -6870,25 +6762,9 @@
                     <a:bodyPr/>
                     <a:lstStyle/>
                     <a:p>
-                      <a:pPr indent="0" marL="0">
-                        <a:buNone/>
-                      </a:pPr>
                       <a:r>
-                        <a:rPr lang="en-US" sz="1250" dirty="0">
-                          <a:solidFill>
-                            <a:srgbClr val="2B3A44"/>
-                          </a:solidFill>
-                          <a:latin typeface="Calibri" pitchFamily="34" charset="0"/>
-                          <a:ea typeface="Calibri" pitchFamily="34" charset="-122"/>
-                          <a:cs typeface="Calibri" pitchFamily="34" charset="-120"/>
-                        </a:rPr>
-                        <a:t>10.5</a:t>
+                        <a:t>11.7</a:t>
                       </a:r>
-                      <a:endParaRPr lang="en-US" sz="1250" dirty="0">
-                        <a:latin typeface="Calibri" charset="0"/>
-                        <a:ea typeface="Calibri" charset="0"/>
-                        <a:cs typeface="Calibri" charset="0"/>
-                      </a:endParaRPr>
                     </a:p>
                   </a:txBody>
                   <a:tcPr marL="91440" marR="91440" marT="45720" marB="45720" anchor="ctr">
@@ -7067,25 +6943,9 @@
                     <a:bodyPr/>
                     <a:lstStyle/>
                     <a:p>
-                      <a:pPr indent="0" marL="0">
-                        <a:buNone/>
-                      </a:pPr>
                       <a:r>
-                        <a:rPr lang="en-US" sz="1250" b="1" dirty="0">
-                          <a:solidFill>
-                            <a:srgbClr val="0F2A3F"/>
-                          </a:solidFill>
-                          <a:latin typeface="Calibri" pitchFamily="34" charset="0"/>
-                          <a:ea typeface="Calibri" pitchFamily="34" charset="-122"/>
-                          <a:cs typeface="Calibri" pitchFamily="34" charset="-120"/>
-                        </a:rPr>
-                        <a:t>343.2</a:t>
+                        <a:t>343.4</a:t>
                       </a:r>
-                      <a:endParaRPr lang="en-US" sz="1250" dirty="0">
-                        <a:latin typeface="Calibri" charset="0"/>
-                        <a:ea typeface="Calibri" charset="0"/>
-                        <a:cs typeface="Calibri" charset="0"/>
-                      </a:endParaRPr>
                     </a:p>
                   </a:txBody>
                   <a:tcPr marL="91440" marR="91440" marT="45720" marB="45720" anchor="ctr">
@@ -7132,25 +6992,9 @@
                     <a:bodyPr/>
                     <a:lstStyle/>
                     <a:p>
-                      <a:pPr indent="0" marL="0">
-                        <a:buNone/>
-                      </a:pPr>
                       <a:r>
-                        <a:rPr lang="en-US" sz="1250" b="1" dirty="0">
-                          <a:solidFill>
-                            <a:srgbClr val="0F2A3F"/>
-                          </a:solidFill>
-                          <a:latin typeface="Calibri" pitchFamily="34" charset="0"/>
-                          <a:ea typeface="Calibri" pitchFamily="34" charset="-122"/>
-                          <a:cs typeface="Calibri" pitchFamily="34" charset="-120"/>
-                        </a:rPr>
-                        <a:t>38.6</a:t>
+                        <a:t>12.1</a:t>
                       </a:r>
-                      <a:endParaRPr lang="en-US" sz="1250" dirty="0">
-                        <a:latin typeface="Calibri" charset="0"/>
-                        <a:ea typeface="Calibri" charset="0"/>
-                        <a:cs typeface="Calibri" charset="0"/>
-                      </a:endParaRPr>
                     </a:p>
                   </a:txBody>
                   <a:tcPr marL="91440" marR="91440" marT="45720" marB="45720" anchor="ctr">
@@ -7197,25 +7041,9 @@
                     <a:bodyPr/>
                     <a:lstStyle/>
                     <a:p>
-                      <a:pPr indent="0" marL="0">
-                        <a:buNone/>
-                      </a:pPr>
                       <a:r>
-                        <a:rPr lang="en-US" sz="1250" b="1" dirty="0">
-                          <a:solidFill>
-                            <a:srgbClr val="0F2A3F"/>
-                          </a:solidFill>
-                          <a:latin typeface="Calibri" pitchFamily="34" charset="0"/>
-                          <a:ea typeface="Calibri" pitchFamily="34" charset="-122"/>
-                          <a:cs typeface="Calibri" pitchFamily="34" charset="-120"/>
-                        </a:rPr>
-                        <a:t>326</a:t>
+                        <a:t>98.4</a:t>
                       </a:r>
-                      <a:endParaRPr lang="en-US" sz="1250" dirty="0">
-                        <a:latin typeface="Calibri" charset="0"/>
-                        <a:ea typeface="Calibri" charset="0"/>
-                        <a:cs typeface="Calibri" charset="0"/>
-                      </a:endParaRPr>
                     </a:p>
                   </a:txBody>
                   <a:tcPr marL="91440" marR="91440" marT="45720" marB="45720" anchor="ctr">
@@ -7262,25 +7090,9 @@
                     <a:bodyPr/>
                     <a:lstStyle/>
                     <a:p>
-                      <a:pPr indent="0" marL="0">
-                        <a:buNone/>
-                      </a:pPr>
                       <a:r>
-                        <a:rPr lang="en-US" sz="1250" b="1" dirty="0">
-                          <a:solidFill>
-                            <a:srgbClr val="0F2A3F"/>
-                          </a:solidFill>
-                          <a:latin typeface="Calibri" pitchFamily="34" charset="0"/>
-                          <a:ea typeface="Calibri" pitchFamily="34" charset="-122"/>
-                          <a:cs typeface="Calibri" pitchFamily="34" charset="-120"/>
-                        </a:rPr>
-                        <a:t>29.2</a:t>
+                        <a:t>11.4</a:t>
                       </a:r>
-                      <a:endParaRPr lang="en-US" sz="1250" dirty="0">
-                        <a:latin typeface="Calibri" charset="0"/>
-                        <a:ea typeface="Calibri" charset="0"/>
-                        <a:cs typeface="Calibri" charset="0"/>
-                      </a:endParaRPr>
                     </a:p>
                   </a:txBody>
                   <a:tcPr marL="91440" marR="91440" marT="45720" marB="45720" anchor="ctr">
@@ -7327,25 +7139,9 @@
                     <a:bodyPr/>
                     <a:lstStyle/>
                     <a:p>
-                      <a:pPr indent="0" marL="0">
-                        <a:buNone/>
-                      </a:pPr>
                       <a:r>
-                        <a:rPr lang="en-US" sz="1250" b="1" dirty="0">
-                          <a:solidFill>
-                            <a:srgbClr val="0F2A3F"/>
-                          </a:solidFill>
-                          <a:latin typeface="Calibri" pitchFamily="34" charset="0"/>
-                          <a:ea typeface="Calibri" pitchFamily="34" charset="-122"/>
-                          <a:cs typeface="Calibri" pitchFamily="34" charset="-120"/>
-                        </a:rPr>
-                        <a:t>2 of 3</a:t>
+                        <a:t>3 of 3</a:t>
                       </a:r>
-                      <a:endParaRPr lang="en-US" sz="1250" dirty="0">
-                        <a:latin typeface="Calibri" charset="0"/>
-                        <a:ea typeface="Calibri" charset="0"/>
-                        <a:cs typeface="Calibri" charset="0"/>
-                      </a:endParaRPr>
                     </a:p>
                   </a:txBody>
                   <a:tcPr marL="91440" marR="91440" marT="45720" marB="45720" anchor="ctr">
@@ -7428,7 +7224,7 @@
                 <a:ea typeface="Calibri" pitchFamily="34" charset="-122"/>
                 <a:cs typeface="Calibri" pitchFamily="34" charset="-120"/>
               </a:rPr>
-              <a:t>Flat to 250 rps - p50 under 12 ms, p99 under 50, nothing erroring. 300 is the edge. </a:t>
+              <a:t>Flat to 300 rps - p50 under 13 ms, p99 under 81, nothing erroring. 400 is the edge. Medians of three identical sweeps, because one sweep is not a measurement: at 400, two of three runs offered it and gave p99 80 ms and 3.5 s, and the third could not offer it at all. Publish the spread, not the best cell.</a:t>
             </a:r>
             <a:pPr indent="0" marL="0">
               <a:lnSpc>
@@ -7445,7 +7241,7 @@
                 <a:ea typeface="Calibri" pitchFamily="34" charset="-122"/>
                 <a:cs typeface="Calibri" pitchFamily="34" charset="-120"/>
               </a:rPr>
-              <a:t>Medians of three identical sweeps, because one sweep is not a measurement: at 300, two runs gave p99 48-54 ms and a third gave 750. At 350 the generator itself fails once in three and at 400 always - three workers and three generators want more than four cores. Plan on 250 a box, a floor not a ceiling.</a:t>
+              <a:t/>
             </a:r>
             <a:endParaRPr lang="en-US" sz="1250" dirty="0"/>
           </a:p>
@@ -7502,6 +7298,10 @@
           </a:solidFill>
           <a:ln/>
         </p:spPr>
+        <p:txBody>
+          <a:bodyPr/>
+          <a:p/>
+        </p:txBody>
       </p:sp>
       <p:sp>
         <p:nvSpPr>
@@ -8887,6 +8687,10 @@
           </a:solidFill>
           <a:ln/>
         </p:spPr>
+        <p:txBody>
+          <a:bodyPr/>
+          <a:p/>
+        </p:txBody>
       </p:sp>
       <p:sp>
         <p:nvSpPr>
@@ -8992,6 +8796,10 @@
             <a:prstDash val="solid"/>
           </a:ln>
         </p:spPr>
+        <p:txBody>
+          <a:bodyPr/>
+          <a:p/>
+        </p:txBody>
       </p:sp>
       <p:sp>
         <p:nvSpPr>
@@ -9103,6 +8911,10 @@
             <a:prstDash val="solid"/>
           </a:ln>
         </p:spPr>
+        <p:txBody>
+          <a:bodyPr/>
+          <a:p/>
+        </p:txBody>
       </p:sp>
       <p:sp>
         <p:nvSpPr>
@@ -9182,7 +8994,7 @@
                 <a:ea typeface="Calibri" pitchFamily="34" charset="-122"/>
                 <a:cs typeface="Calibri" pitchFamily="34" charset="-120"/>
               </a:rPr>
-              <a:t>This was the first version. Warm models remove the per-request load, and what remains is still 60 ms of pandas. Good, and not enough for a page load.</a:t>
+              <a:t>This was the first version. Warm models remove the per-request load, and what remains is still 67 ms of pandas. Good, and not enough for a page load.</a:t>
             </a:r>
             <a:endParaRPr lang="en-US" sz="1200" dirty="0"/>
           </a:p>
@@ -9214,6 +9026,10 @@
             <a:prstDash val="solid"/>
           </a:ln>
         </p:spPr>
+        <p:txBody>
+          <a:bodyPr/>
+          <a:p/>
+        </p:txBody>
       </p:sp>
       <p:sp>
         <p:nvSpPr>
@@ -9325,6 +9141,10 @@
             <a:prstDash val="solid"/>
           </a:ln>
         </p:spPr>
+        <p:txBody>
+          <a:bodyPr/>
+          <a:p/>
+        </p:txBody>
       </p:sp>
       <p:sp>
         <p:nvSpPr>
@@ -9436,6 +9256,10 @@
             <a:prstDash val="solid"/>
           </a:ln>
         </p:spPr>
+        <p:txBody>
+          <a:bodyPr/>
+          <a:p/>
+        </p:txBody>
       </p:sp>
       <p:sp>
         <p:nvSpPr>
@@ -9547,6 +9371,10 @@
             <a:prstDash val="solid"/>
           </a:ln>
         </p:spPr>
+        <p:txBody>
+          <a:bodyPr/>
+          <a:p/>
+        </p:txBody>
       </p:sp>
       <p:sp>
         <p:nvSpPr>
@@ -9727,6 +9555,10 @@
             <a:prstDash val="solid"/>
           </a:ln>
         </p:spPr>
+        <p:txBody>
+          <a:bodyPr/>
+          <a:p/>
+        </p:txBody>
       </p:sp>
       <p:sp>
         <p:nvSpPr>
@@ -9872,6 +9704,10 @@
             <a:prstDash val="solid"/>
           </a:ln>
         </p:spPr>
+        <p:txBody>
+          <a:bodyPr/>
+          <a:p/>
+        </p:txBody>
       </p:sp>
       <p:sp>
         <p:nvSpPr>
@@ -10017,6 +9853,10 @@
             <a:prstDash val="solid"/>
           </a:ln>
         </p:spPr>
+        <p:txBody>
+          <a:bodyPr/>
+          <a:p/>
+        </p:txBody>
       </p:sp>
       <p:sp>
         <p:nvSpPr>
@@ -10162,6 +10002,10 @@
             <a:prstDash val="solid"/>
           </a:ln>
         </p:spPr>
+        <p:txBody>
+          <a:bodyPr/>
+          <a:p/>
+        </p:txBody>
       </p:sp>
       <p:sp>
         <p:nvSpPr>
@@ -10373,6 +10217,10 @@
           </a:solidFill>
           <a:ln/>
         </p:spPr>
+        <p:txBody>
+          <a:bodyPr/>
+          <a:p/>
+        </p:txBody>
       </p:sp>
       <p:sp>
         <p:nvSpPr>
@@ -10517,6 +10365,10 @@
             <a:prstDash val="solid"/>
           </a:ln>
         </p:spPr>
+        <p:txBody>
+          <a:bodyPr/>
+          <a:p/>
+        </p:txBody>
       </p:sp>
       <p:sp>
         <p:nvSpPr>
@@ -10850,7 +10702,7 @@
                 <a:ea typeface="Calibri" pitchFamily="34" charset="-122"/>
                 <a:cs typeface="Calibri" pitchFamily="34" charset="-120"/>
               </a:rPr>
-              <a:t>FastAPI endpoint, open-loop load harness, 62 tests</a:t>
+              <a:t>FastAPI endpoint, open-loop load harness, 399 tests</a:t>
             </a:r>
             <a:endParaRPr lang="en-US" sz="1350" dirty="0"/>
           </a:p>
@@ -10907,6 +10759,10 @@
           </a:solidFill>
           <a:ln/>
         </p:spPr>
+        <p:txBody>
+          <a:bodyPr/>
+          <a:p/>
+        </p:txBody>
       </p:sp>
       <p:sp>
         <p:nvSpPr>
@@ -11051,6 +10907,10 @@
             <a:prstDash val="solid"/>
           </a:ln>
         </p:spPr>
+        <p:txBody>
+          <a:bodyPr/>
+          <a:p/>
+        </p:txBody>
       </p:sp>
       <p:sp>
         <p:nvSpPr>
@@ -11195,6 +11055,10 @@
             <a:prstDash val="solid"/>
           </a:ln>
         </p:spPr>
+        <p:txBody>
+          <a:bodyPr/>
+          <a:p/>
+        </p:txBody>
       </p:sp>
       <p:sp>
         <p:nvSpPr>
@@ -11339,6 +11203,10 @@
             <a:prstDash val="solid"/>
           </a:ln>
         </p:spPr>
+        <p:txBody>
+          <a:bodyPr/>
+          <a:p/>
+        </p:txBody>
       </p:sp>
       <p:sp>
         <p:nvSpPr>
@@ -11483,6 +11351,10 @@
             <a:prstDash val="solid"/>
           </a:ln>
         </p:spPr>
+        <p:txBody>
+          <a:bodyPr/>
+          <a:p/>
+        </p:txBody>
       </p:sp>
       <p:sp>
         <p:nvSpPr>
@@ -11627,6 +11499,10 @@
             <a:prstDash val="solid"/>
           </a:ln>
         </p:spPr>
+        <p:txBody>
+          <a:bodyPr/>
+          <a:p/>
+        </p:txBody>
       </p:sp>
       <p:sp>
         <p:nvSpPr>
@@ -12624,6 +12500,10 @@
           </a:solidFill>
           <a:ln/>
         </p:spPr>
+        <p:txBody>
+          <a:bodyPr/>
+          <a:p/>
+        </p:txBody>
       </p:sp>
       <p:sp>
         <p:nvSpPr>
@@ -13939,6 +13819,10 @@
             <a:prstDash val="solid"/>
           </a:ln>
         </p:spPr>
+        <p:txBody>
+          <a:bodyPr/>
+          <a:p/>
+        </p:txBody>
       </p:sp>
       <p:sp>
         <p:nvSpPr>
@@ -14072,6 +13956,10 @@
           </a:solidFill>
           <a:ln/>
         </p:spPr>
+        <p:txBody>
+          <a:bodyPr/>
+          <a:p/>
+        </p:txBody>
       </p:sp>
       <p:sp>
         <p:nvSpPr>
@@ -14216,6 +14104,10 @@
             <a:prstDash val="solid"/>
           </a:ln>
         </p:spPr>
+        <p:txBody>
+          <a:bodyPr/>
+          <a:p/>
+        </p:txBody>
       </p:sp>
       <p:sp>
         <p:nvSpPr>
@@ -14590,6 +14482,10 @@
             <a:prstDash val="solid"/>
           </a:ln>
         </p:spPr>
+        <p:txBody>
+          <a:bodyPr/>
+          <a:p/>
+        </p:txBody>
       </p:sp>
       <p:sp>
         <p:nvSpPr>
@@ -14746,6 +14642,10 @@
           </a:solidFill>
           <a:ln/>
         </p:spPr>
+        <p:txBody>
+          <a:bodyPr/>
+          <a:p/>
+        </p:txBody>
       </p:sp>
       <p:sp>
         <p:nvSpPr>
@@ -14819,7 +14719,7 @@
                 <a:ea typeface="Cambria" pitchFamily="34" charset="-122"/>
                 <a:cs typeface="Cambria" pitchFamily="34" charset="-120"/>
               </a:rPr>
-              <a:t>Dilemma 1 — “don't change the logic” vs 60 ms</a:t>
+              <a:t>Dilemma 1 — “don't change the logic” vs 67 ms</a:t>
             </a:r>
             <a:endParaRPr lang="en-US" sz="3000" dirty="0"/>
           </a:p>
@@ -14900,7 +14800,7 @@
                 <a:ea typeface="Calibri" pitchFamily="34" charset="-122"/>
                 <a:cs typeface="Calibri" pitchFamily="34" charset="-120"/>
               </a:rPr>
-              <a:t>One request, models already warm, is 60 ms. Almost none of it is arithmetic — it is roughly a hundred pandas calls to transform fifteen rows, and the cost is per operation, not per row.</a:t>
+              <a:t>One request, models already warm, is 67 ms. Almost none of it is arithmetic — it is roughly a hundred pandas calls to transform ten rows, and the cost is per operation, not per row.</a:t>
             </a:r>
             <a:endParaRPr lang="en-US" sz="1400" dirty="0"/>
           </a:p>
@@ -14932,6 +14832,10 @@
             <a:prstDash val="solid"/>
           </a:ln>
         </p:spPr>
+        <p:txBody>
+          <a:bodyPr/>
+          <a:p/>
+        </p:txBody>
       </p:sp>
       <p:sp>
         <p:nvSpPr>
@@ -14966,7 +14870,7 @@
                 <a:ea typeface="Calibri" pitchFamily="34" charset="-122"/>
                 <a:cs typeface="Calibri" pitchFamily="34" charset="-120"/>
               </a:rPr>
-              <a:t>Ship 60 ms</a:t>
+              <a:t>Ship 67 ms</a:t>
             </a:r>
             <a:endParaRPr lang="en-US" sz="1400" dirty="0"/>
           </a:p>
@@ -15040,6 +14944,10 @@
             <a:prstDash val="solid"/>
           </a:ln>
         </p:spPr>
+        <p:txBody>
+          <a:bodyPr/>
+          <a:p/>
+        </p:txBody>
       </p:sp>
       <p:sp>
         <p:nvSpPr>
@@ -15148,6 +15056,10 @@
             <a:prstDash val="solid"/>
           </a:ln>
         </p:spPr>
+        <p:txBody>
+          <a:bodyPr/>
+          <a:p/>
+        </p:txBody>
       </p:sp>
       <p:sp>
         <p:nvSpPr>
@@ -15340,6 +15252,10 @@
           </a:solidFill>
           <a:ln/>
         </p:spPr>
+        <p:txBody>
+          <a:bodyPr/>
+          <a:p/>
+        </p:txBody>
       </p:sp>
       <p:sp>
         <p:nvSpPr>
@@ -15413,7 +15329,7 @@
                 <a:ea typeface="Cambria" pitchFamily="34" charset="-122"/>
                 <a:cs typeface="Cambria" pitchFamily="34" charset="-120"/>
               </a:rPr>
-              <a:t>How the 60 ms went away</a:t>
+              <a:t>How the 67 ms went away</a:t>
             </a:r>
             <a:endParaRPr lang="en-US" sz="3000" dirty="0"/>
           </a:p>
@@ -15500,6 +15416,10 @@
             <a:prstDash val="solid"/>
           </a:ln>
         </p:spPr>
+        <p:txBody>
+          <a:bodyPr/>
+          <a:p/>
+        </p:txBody>
       </p:sp>
       <p:sp>
         <p:nvSpPr>
@@ -15534,7 +15454,7 @@
                 <a:ea typeface="Cambria" pitchFamily="34" charset="-122"/>
                 <a:cs typeface="Cambria" pitchFamily="34" charset="-120"/>
               </a:rPr>
-              <a:t>25×</a:t>
+              <a:t>26×</a:t>
             </a:r>
             <a:endParaRPr lang="en-US" sz="3200" dirty="0"/>
           </a:p>
@@ -15605,6 +15525,10 @@
             <a:prstDash val="solid"/>
           </a:ln>
         </p:spPr>
+        <p:txBody>
+          <a:bodyPr/>
+          <a:p/>
+        </p:txBody>
       </p:sp>
       <p:sp>
         <p:nvSpPr>
@@ -15763,7 +15687,7 @@
                 <a:ea typeface="Calibri" pitchFamily="34" charset="-122"/>
                 <a:cs typeface="Calibri" pitchFamily="34" charset="-120"/>
               </a:rPr>
-              <a:t>cross join — 3.0 ms</a:t>
+              <a:t>cross join</a:t>
             </a:r>
             <a:endParaRPr lang="en-US" sz="1200" dirty="0"/>
           </a:p>
@@ -15787,7 +15711,7 @@
                 <a:ea typeface="Calibri" pitchFamily="34" charset="-122"/>
                 <a:cs typeface="Calibri" pitchFamily="34" charset="-120"/>
               </a:rPr>
-              <a:t>DataFrame from a dict — 0.9 ms</a:t>
+              <a:t>DataFrame from a dict</a:t>
             </a:r>
             <a:endParaRPr lang="en-US" sz="1200" dirty="0"/>
           </a:p>
@@ -15811,7 +15735,7 @@
                 <a:ea typeface="Calibri" pitchFamily="34" charset="-122"/>
                 <a:cs typeface="Calibri" pitchFamily="34" charset="-120"/>
               </a:rPr>
-              <a:t>four to_datetime calls — 0.6 ms each</a:t>
+              <a:t>four to_datetime calls</a:t>
             </a:r>
             <a:endParaRPr lang="en-US" sz="1200" dirty="0"/>
           </a:p>
@@ -15835,7 +15759,7 @@
                 <a:ea typeface="Calibri" pitchFamily="34" charset="-122"/>
                 <a:cs typeface="Calibri" pitchFamily="34" charset="-120"/>
               </a:rPr>
-              <a:t>apply(lambda: pd.Series) — 1.3 ms</a:t>
+              <a:t>apply(lambda: pd.Series)</a:t>
             </a:r>
             <a:endParaRPr lang="en-US" sz="1200" dirty="0"/>
           </a:p>
@@ -15859,7 +15783,7 @@
                 <a:ea typeface="Calibri" pitchFamily="34" charset="-122"/>
                 <a:cs typeface="Calibri" pitchFamily="34" charset="-120"/>
               </a:rPr>
-              <a:t>~20 .loc assignments — 0.33 ms each</a:t>
+              <a:t>~20 .loc assignments</a:t>
             </a:r>
             <a:endParaRPr lang="en-US" sz="1200" dirty="0"/>
           </a:p>
@@ -15901,7 +15825,7 @@
                 <a:ea typeface="Calibri" pitchFamily="34" charset="-122"/>
                 <a:cs typeface="Calibri" pitchFamily="34" charset="-120"/>
               </a:rPr>
-              <a:t>Inside the 2.41 ms: 0.33 ms building one CatBoost Pool shared by both models, 0.97 ms in the classifier, 0.79 ms in the payout model, 0.05 ms for features, broadcast and ranking together. Stage medians, so they do not sum exactly. Production model — 81k rows, a 70 MB classifier.</a:t>
+              <a:t>Inside the 2.7 ms: 0.38 ms building one CatBoost Pool shared by both models, 1.27 ms in the classifier, 0.83 ms in the payout model, 0.20 ms for features, broadcast and ranking together. Stage medians, so they do not sum exactly. Production model — 55k rows, a 70 MB classifier.</a:t>
             </a:r>
             <a:endParaRPr lang="en-US" sz="1250" dirty="0"/>
           </a:p>
@@ -15958,6 +15882,10 @@
           </a:solidFill>
           <a:ln/>
         </p:spPr>
+        <p:txBody>
+          <a:bodyPr/>
+          <a:p/>
+        </p:txBody>
       </p:sp>
       <p:sp>
         <p:nvSpPr>
@@ -16102,6 +16030,10 @@
             <a:prstDash val="solid"/>
           </a:ln>
         </p:spPr>
+        <p:txBody>
+          <a:bodyPr/>
+          <a:p/>
+        </p:txBody>
       </p:sp>
       <p:sp>
         <p:nvSpPr>
@@ -16608,25 +16540,9 @@
                     <a:bodyPr/>
                     <a:lstStyle/>
                     <a:p>
-                      <a:pPr indent="0" marL="0">
-                        <a:buNone/>
-                      </a:pPr>
                       <a:r>
-                        <a:rPr lang="en-US" sz="1250" dirty="0">
-                          <a:solidFill>
-                            <a:srgbClr val="2B3A44"/>
-                          </a:solidFill>
-                          <a:latin typeface="Calibri" pitchFamily="34" charset="0"/>
-                          <a:ea typeface="Calibri" pitchFamily="34" charset="-122"/>
-                          <a:cs typeface="Calibri" pitchFamily="34" charset="-120"/>
-                        </a:rPr>
-                        <a:t>0.2 s</a:t>
+                        <a:t>0.1 s</a:t>
                       </a:r>
-                      <a:endParaRPr lang="en-US" sz="1250" dirty="0">
-                        <a:latin typeface="Calibri" charset="0"/>
-                        <a:ea typeface="Calibri" charset="0"/>
-                        <a:cs typeface="Calibri" charset="0"/>
-                      </a:endParaRPr>
                     </a:p>
                   </a:txBody>
                   <a:tcPr marL="91440" marR="91440" marT="45720" marB="45720" anchor="ctr">
@@ -16685,7 +16601,7 @@
                           <a:ea typeface="Calibri" pitchFamily="34" charset="-122"/>
                           <a:cs typeface="Calibri" pitchFamily="34" charset="-120"/>
                         </a:rPr>
-                        <a:t>37.3 s</a:t>
+                        <a:t>7.35 s</a:t>
                       </a:r>
                       <a:endParaRPr lang="en-US" sz="1250" dirty="0">
                         <a:latin typeface="Calibri" charset="0"/>
@@ -16750,7 +16666,7 @@
                           <a:ea typeface="Calibri" pitchFamily="34" charset="-122"/>
                           <a:cs typeface="Calibri" pitchFamily="34" charset="-120"/>
                         </a:rPr>
-                        <a:t>$4.03</a:t>
+                        <a:t>$0.213</a:t>
                       </a:r>
                       <a:endParaRPr lang="en-US" sz="1250" dirty="0">
                         <a:latin typeface="Calibri" charset="0"/>
@@ -16870,25 +16786,9 @@
                     <a:bodyPr/>
                     <a:lstStyle/>
                     <a:p>
-                      <a:pPr indent="0" marL="0">
-                        <a:buNone/>
-                      </a:pPr>
                       <a:r>
-                        <a:rPr lang="en-US" sz="1250" dirty="0">
-                          <a:solidFill>
-                            <a:srgbClr val="2B3A44"/>
-                          </a:solidFill>
-                          <a:latin typeface="Calibri" pitchFamily="34" charset="0"/>
-                          <a:ea typeface="Calibri" pitchFamily="34" charset="-122"/>
-                          <a:cs typeface="Calibri" pitchFamily="34" charset="-120"/>
-                        </a:rPr>
-                        <a:t>0.4 s</a:t>
+                        <a:t>3.1 s</a:t>
                       </a:r>
-                      <a:endParaRPr lang="en-US" sz="1250" dirty="0">
-                        <a:latin typeface="Calibri" charset="0"/>
-                        <a:ea typeface="Calibri" charset="0"/>
-                        <a:cs typeface="Calibri" charset="0"/>
-                      </a:endParaRPr>
                     </a:p>
                   </a:txBody>
                   <a:tcPr marL="91440" marR="91440" marT="45720" marB="45720" anchor="ctr">
@@ -16947,7 +16847,7 @@
                           <a:ea typeface="Calibri" pitchFamily="34" charset="-122"/>
                           <a:cs typeface="Calibri" pitchFamily="34" charset="-120"/>
                         </a:rPr>
-                        <a:t>8.69 s</a:t>
+                        <a:t>7.65 s</a:t>
                       </a:r>
                       <a:endParaRPr lang="en-US" sz="1250" dirty="0">
                         <a:latin typeface="Calibri" charset="0"/>
@@ -17144,7 +17044,7 @@
                           <a:ea typeface="Calibri" pitchFamily="34" charset="-122"/>
                           <a:cs typeface="Calibri" pitchFamily="34" charset="-120"/>
                         </a:rPr>
-                        <a:t>14.9 s</a:t>
+                        <a:t>7.95 s</a:t>
                       </a:r>
                       <a:endParaRPr lang="en-US" sz="1250" dirty="0">
                         <a:latin typeface="Calibri" charset="0"/>
@@ -17209,7 +17109,7 @@
                           <a:ea typeface="Calibri" pitchFamily="34" charset="-122"/>
                           <a:cs typeface="Calibri" pitchFamily="34" charset="-120"/>
                         </a:rPr>
-                        <a:t>0.26 s</a:t>
+                        <a:t>0.15 s</a:t>
                       </a:r>
                       <a:endParaRPr lang="en-US" sz="1250" dirty="0">
                         <a:latin typeface="Calibri" charset="0"/>
@@ -17274,7 +17174,7 @@
                           <a:ea typeface="Calibri" pitchFamily="34" charset="-122"/>
                           <a:cs typeface="Calibri" pitchFamily="34" charset="-120"/>
                         </a:rPr>
-                        <a:t>$0.000045</a:t>
+                        <a:t>$0.000469</a:t>
                       </a:r>
                       <a:endParaRPr lang="en-US" sz="1250" dirty="0">
                         <a:latin typeface="Calibri" charset="0"/>
@@ -17625,7 +17525,7 @@
                 <a:ea typeface="Calibri" pitchFamily="34" charset="-122"/>
                 <a:cs typeface="Calibri" pitchFamily="34" charset="-120"/>
               </a:rPr>
-              <a:t>fit_with_cache is 33× faster than the library default for a relative difference around 1e-6 — the single biggest exact-preserving win available, and the one the research code leaves on the table. </a:t>
+              <a:t>fit_with_cache is 51× faster than the library default for a difference far below any ranking tie — the single biggest exact-preserving win available, and the one the research code leaves on the table. </a:t>
             </a:r>
             <a:pPr indent="0" marL="0">
               <a:lnSpc>
@@ -17642,7 +17542,7 @@
                 <a:ea typeface="Calibri" pitchFamily="34" charset="-122"/>
                 <a:cs typeface="Calibri" pitchFamily="34" charset="-120"/>
               </a:rPr>
-              <a:t>It does not rescue the request path: at the shipped n_estimators = 4, a whole request is 457 ms.</a:t>
+              <a:t>It does not rescue the request path: at the shipped n_estimators = 4, a whole request is 261 ms.</a:t>
             </a:r>
             <a:pPr indent="0" marL="0">
               <a:lnSpc>
@@ -17716,6 +17616,10 @@
           </a:solidFill>
           <a:ln/>
         </p:spPr>
+        <p:txBody>
+          <a:bodyPr/>
+          <a:p/>
+        </p:txBody>
       </p:sp>
       <p:sp>
         <p:nvSpPr>
@@ -17860,6 +17764,10 @@
             <a:prstDash val="solid"/>
           </a:ln>
         </p:spPr>
+        <p:txBody>
+          <a:bodyPr/>
+          <a:p/>
+        </p:txBody>
       </p:sp>
       <p:sp>
         <p:nvSpPr>
@@ -17933,7 +17841,7 @@
                 <a:ea typeface="Cambria" pitchFamily="34" charset="-122"/>
                 <a:cs typeface="Cambria" pitchFamily="34" charset="-120"/>
               </a:rPr>
-              <a:t>4.1 ms</a:t>
+              <a:t>2.7 ms</a:t>
             </a:r>
             <a:endParaRPr lang="en-US" sz="1700" dirty="0"/>
           </a:p>
@@ -18046,6 +17954,10 @@
             <a:prstDash val="solid"/>
           </a:ln>
         </p:spPr>
+        <p:txBody>
+          <a:bodyPr/>
+          <a:p/>
+        </p:txBody>
       </p:sp>
       <p:sp>
         <p:nvSpPr>
@@ -18232,6 +18144,10 @@
             <a:prstDash val="solid"/>
           </a:ln>
         </p:spPr>
+        <p:txBody>
+          <a:bodyPr/>
+          <a:p/>
+        </p:txBody>
       </p:sp>
       <p:sp>
         <p:nvSpPr>
@@ -18305,7 +18221,7 @@
                 <a:ea typeface="Cambria" pitchFamily="34" charset="-122"/>
                 <a:cs typeface="Cambria" pitchFamily="34" charset="-120"/>
               </a:rPr>
-              <a:t>457 ms</a:t>
+              <a:t>261 ms</a:t>
             </a:r>
             <a:endParaRPr lang="en-US" sz="1700" dirty="0"/>
           </a:p>
@@ -18418,6 +18334,10 @@
             <a:prstDash val="solid"/>
           </a:ln>
         </p:spPr>
+        <p:txBody>
+          <a:bodyPr/>
+          <a:p/>
+        </p:txBody>
       </p:sp>
       <p:sp>
         <p:nvSpPr>
@@ -18491,7 +18411,7 @@
                 <a:ea typeface="Cambria" pitchFamily="34" charset="-122"/>
                 <a:cs typeface="Cambria" pitchFamily="34" charset="-120"/>
               </a:rPr>
-              <a:t>4 ms</a:t>
+              <a:t>2.7 ms</a:t>
             </a:r>
             <a:endParaRPr lang="en-US" sz="1700" dirty="0"/>
           </a:p>
@@ -18614,7 +18534,7 @@
                 <a:ea typeface="Calibri" pitchFamily="34" charset="-122"/>
                 <a:cs typeface="Calibri" pitchFamily="34" charset="-120"/>
               </a:rPr>
-              <a:t>End to end on 200 random users:  </a:t>
+              <a:t>End to end on 200 random users:  the student puts the same brand first 99.5% of the time, and when it disagrees it gives up 0.41% of that user’s expected payout — 0.00% averaged over everyone. So the trade is essentially free: 0.00% of expected payout against ~260 ms of page latency. One environment variable overturns it.</a:t>
             </a:r>
             <a:pPr indent="0" marL="0">
               <a:lnSpc>
@@ -18631,7 +18551,7 @@
                 <a:ea typeface="Calibri" pitchFamily="34" charset="-122"/>
                 <a:cs typeface="Calibri" pitchFamily="34" charset="-120"/>
               </a:rPr>
-              <a:t>the student puts the same brand first </a:t>
+              <a:t/>
             </a:r>
             <a:pPr indent="0" marL="0">
               <a:lnSpc>
@@ -18648,7 +18568,7 @@
                 <a:ea typeface="Calibri" pitchFamily="34" charset="-122"/>
                 <a:cs typeface="Calibri" pitchFamily="34" charset="-120"/>
               </a:rPr>
-              <a:t>84.5%</a:t>
+              <a:t/>
             </a:r>
             <a:pPr indent="0" marL="0">
               <a:lnSpc>
@@ -18665,7 +18585,7 @@
                 <a:ea typeface="Calibri" pitchFamily="34" charset="-122"/>
                 <a:cs typeface="Calibri" pitchFamily="34" charset="-120"/>
               </a:rPr>
-              <a:t> of the time, and when it disagrees it gives up 7.8% of that user’s expected payout — </a:t>
+              <a:t/>
             </a:r>
             <a:pPr indent="0" marL="0">
               <a:lnSpc>
@@ -18682,7 +18602,7 @@
                 <a:ea typeface="Calibri" pitchFamily="34" charset="-122"/>
                 <a:cs typeface="Calibri" pitchFamily="34" charset="-120"/>
               </a:rPr>
-              <a:t>1.21% averaged over everyone</a:t>
+              <a:t/>
             </a:r>
             <a:pPr indent="0" marL="0">
               <a:lnSpc>
@@ -18699,7 +18619,7 @@
                 <a:ea typeface="Calibri" pitchFamily="34" charset="-122"/>
                 <a:cs typeface="Calibri" pitchFamily="34" charset="-120"/>
               </a:rPr>
-              <a:t>. So the trade is 1.21% of expected payout against 450 ms of page latency. One environment variable overturns it.</a:t>
+              <a:t/>
             </a:r>
             <a:endParaRPr lang="en-US" sz="1250" dirty="0"/>
           </a:p>

--- a/docs/BL_ranking_part2.pptx
+++ b/docs/BL_ranking_part2.pptx
@@ -179,20 +179,18 @@
             <c:showLeaderLines val="0"/>
           </c:dLbls>
           <c:cat>
-            <c:multiLvlStrRef>
+            <c:strRef>
               <c:f>Sheet1!$A$2:$A$3</c:f>
-              <c:multiLvlStrCache>
+              <c:strCache>
                 <c:ptCount val="2"/>
-                <c:lvl>
-                  <c:pt idx="0">
-                    <c:v>Research pipeline</c:v>
-                  </c:pt>
-                  <c:pt idx="1">
-                    <c:v>Vectorised path</c:v>
-                  </c:pt>
-                </c:lvl>
-              </c:multiLvlStrCache>
-            </c:multiLvlStrRef>
+                <c:pt idx="0">
+                  <c:v>Research pipeline</c:v>
+                </c:pt>
+                <c:pt idx="1">
+                  <c:v>Vectorised path</c:v>
+                </c:pt>
+              </c:strCache>
+            </c:strRef>
           </c:cat>
           <c:val>
             <c:numRef>
@@ -201,10 +199,10 @@
                 <c:formatCode>General</c:formatCode>
                 <c:ptCount val="2"/>
                 <c:pt idx="0">
-                  <c:v>60.3</c:v>
+                  <c:v>66.8</c:v>
                 </c:pt>
                 <c:pt idx="1">
-                  <c:v>2.41</c:v>
+                  <c:v>2.7</c:v>
                 </c:pt>
               </c:numCache>
             </c:numRef>
@@ -839,7 +837,7 @@
           <a:p>
             <a:r>
               <a:rPr lang="en-US" dirty="0"/>
-              <a:t>With three worker processes the original costs 7 GB and 18 seconds per worker before a single request is served. This is the kind of thing that never shows up in a research notebook and dominates a deployment.</a:t>
+              <a:t>With three worker processes the original costs 2.1 GB and 9.5 s per worker — 6.3 GB resident before a single request is served. This is the kind of thing that never shows up in a research notebook and dominates a deployment.</a:t>
             </a:r>
             <a:endParaRPr lang="en-US" dirty="0"/>
           </a:p>
@@ -1015,7 +1013,7 @@
           <a:p>
             <a:r>
               <a:rPr lang="en-US" dirty="0"/>
-              <a:t>Three uvicorn worker processes on four cores, one BLAS thread each, access log off. The load generator shares those four cores, so past a few hundred requests per second it becomes a co-bottleneck; that is stated in the report rather than quietly trimmed.</a:t>
+              <a:t>Three uvicorn worker processes on twelve cores, one BLAS thread each, access log off. The load generator shares those twelve cores, so past a few hundred requests per second it becomes a co-bottleneck; that is stated in the report rather than quietly trimmed.</a:t>
             </a:r>
             <a:endParaRPr lang="en-US" dirty="0"/>
           </a:p>
@@ -1895,7 +1893,7 @@
           <a:p>
             <a:r>
               <a:rPr lang="en-US" dirty="0"/>
-              <a:t>Measured on the 4-CPU box this was built on, context 1000x25, one request being one user scored against 15 brands. low_memory is worth noting for the opposite reason: slowest AND the only mode that differs materially, so it is never the right choice here.</a:t>
+              <a:t>Measured on the 12-core box this was built on, context 1000x25, one request being one user scored against 10 brands. low_memory is worth noting for the opposite reason: it saves three seconds of start-up but still pays 7.35 s per predict, and it is the only mode that differs materially — $0.213, against $0.000469 for fit_with_cache — so it is never the right choice here.</a:t>
             </a:r>
             <a:endParaRPr lang="en-US" dirty="0"/>
           </a:p>
@@ -1983,7 +1981,7 @@
           <a:p>
             <a:r>
               <a:rPr lang="en-US" dirty="0"/>
-              <a:t>The training job logs its own fidelity check and that check says the student agrees with the teacher essentially always — rank correlation 0.993, same top brand every time. I did not believe it, because the distillation sample is drawn from the payout context, a narrow high-value slice, and it compares payout predictions rather than the ranking they produce. Measuring the ranking itself gave 84.5%. The training metric stays, as a regression detector, but the number I quote is the end-to-end one. The approximation is surfaced in three places: MLflow metrics, model version tags, and every API response.</a:t>
+              <a:t>The training job logs its own fidelity check — rank correlation 0.986, measured on the distillation sample. I did not want to quote that number, because the sample is drawn from the payout context, a narrow high-value slice, and it compares payout predictions rather than the ranking they produce: it could look healthy while the ranking moved underneath it. So I measured the ranking itself, end to end on 200 random users, and it came back 99.5% top-1 agreement. The training metric stays, as a regression detector, but the number I quote is the end-to-end one. The approximation is surfaced in three places: MLflow metrics, model version tags, and every API response.</a:t>
             </a:r>
             <a:endParaRPr lang="en-US" dirty="0"/>
           </a:p>
@@ -15454,7 +15452,7 @@
                 <a:ea typeface="Cambria" pitchFamily="34" charset="-122"/>
                 <a:cs typeface="Cambria" pitchFamily="34" charset="-120"/>
               </a:rPr>
-              <a:t>26×</a:t>
+              <a:t>25×</a:t>
             </a:r>
             <a:endParaRPr lang="en-US" sz="3200" dirty="0"/>
           </a:p>
